--- a/presentations/27.2/School mapping in ESRI imagery.pptx
+++ b/presentations/27.2/School mapping in ESRI imagery.pptx
@@ -5,7 +5,7 @@
     <p:sldMasterId id="2147483684" r:id="rId1"/>
   </p:sldMasterIdLst>
   <p:notesMasterIdLst>
-    <p:notesMasterId r:id="rId18"/>
+    <p:notesMasterId r:id="rId19"/>
   </p:notesMasterIdLst>
   <p:sldIdLst>
     <p:sldId id="256" r:id="rId2"/>
@@ -23,7 +23,8 @@
     <p:sldId id="321" r:id="rId14"/>
     <p:sldId id="298" r:id="rId15"/>
     <p:sldId id="302" r:id="rId16"/>
-    <p:sldId id="315" r:id="rId17"/>
+    <p:sldId id="322" r:id="rId17"/>
+    <p:sldId id="315" r:id="rId18"/>
   </p:sldIdLst>
   <p:sldSz cx="12192000" cy="6858000"/>
   <p:notesSz cx="6858000" cy="9144000"/>
@@ -4709,14 +4710,14 @@
           <p:nvPr>
             <p:extLst>
               <p:ext uri="{D42A27DB-BD31-4B8C-83A1-F6EECF244321}">
-                <p14:modId xmlns:p14="http://schemas.microsoft.com/office/powerpoint/2010/main" val="3351378325"/>
+                <p14:modId xmlns:p14="http://schemas.microsoft.com/office/powerpoint/2010/main" val="766935166"/>
               </p:ext>
             </p:extLst>
           </p:nvPr>
         </p:nvGraphicFramePr>
         <p:xfrm>
-          <a:off x="412750" y="597105"/>
-          <a:ext cx="11366500" cy="5419950"/>
+          <a:off x="184164" y="719025"/>
+          <a:ext cx="11823672" cy="5419950"/>
         </p:xfrm>
         <a:graphic>
           <a:graphicData uri="http://schemas.openxmlformats.org/drawingml/2006/table">
@@ -4725,42 +4726,49 @@
                 <a:tableStyleId>{5C22544A-7EE6-4342-B048-85BDC9FD1C3A}</a:tableStyleId>
               </a:tblPr>
               <a:tblGrid>
-                <a:gridCol w="1678456">
+                <a:gridCol w="1644623">
                   <a:extLst>
                     <a:ext uri="{9D8B030D-6E8A-4147-A177-3AD203B41FA5}">
                       <a16:colId xmlns:a16="http://schemas.microsoft.com/office/drawing/2014/main" val="1991548073"/>
                     </a:ext>
                   </a:extLst>
                 </a:gridCol>
-                <a:gridCol w="1678456">
+                <a:gridCol w="1391404">
                   <a:extLst>
                     <a:ext uri="{9D8B030D-6E8A-4147-A177-3AD203B41FA5}">
                       <a16:colId xmlns:a16="http://schemas.microsoft.com/office/drawing/2014/main" val="3575401396"/>
                     </a:ext>
                   </a:extLst>
                 </a:gridCol>
-                <a:gridCol w="2079050">
+                <a:gridCol w="1589483">
+                  <a:extLst>
+                    <a:ext uri="{9D8B030D-6E8A-4147-A177-3AD203B41FA5}">
+                      <a16:colId xmlns:a16="http://schemas.microsoft.com/office/drawing/2014/main" val="330325923"/>
+                    </a:ext>
+                  </a:extLst>
+                </a:gridCol>
+                <a:gridCol w="1907378">
                   <a:extLst>
                     <a:ext uri="{9D8B030D-6E8A-4147-A177-3AD203B41FA5}">
                       <a16:colId xmlns:a16="http://schemas.microsoft.com/office/drawing/2014/main" val="2013928293"/>
                     </a:ext>
                   </a:extLst>
                 </a:gridCol>
-                <a:gridCol w="1872343">
+                <a:gridCol w="1700055">
                   <a:extLst>
                     <a:ext uri="{9D8B030D-6E8A-4147-A177-3AD203B41FA5}">
                       <a16:colId xmlns:a16="http://schemas.microsoft.com/office/drawing/2014/main" val="682525828"/>
                     </a:ext>
                   </a:extLst>
                 </a:gridCol>
-                <a:gridCol w="2046515">
+                <a:gridCol w="1686234">
                   <a:extLst>
                     <a:ext uri="{9D8B030D-6E8A-4147-A177-3AD203B41FA5}">
                       <a16:colId xmlns:a16="http://schemas.microsoft.com/office/drawing/2014/main" val="2417135976"/>
                     </a:ext>
                   </a:extLst>
                 </a:gridCol>
-                <a:gridCol w="2011680">
+                <a:gridCol w="1904495">
                   <a:extLst>
                     <a:ext uri="{9D8B030D-6E8A-4147-A177-3AD203B41FA5}">
                       <a16:colId xmlns:a16="http://schemas.microsoft.com/office/drawing/2014/main" val="1842548248"/>
@@ -4797,7 +4805,17 @@
                       <a:endParaRPr lang="hr-HR" sz="2400" dirty="0"/>
                     </a:p>
                   </a:txBody>
-                  <a:tcPr anchor="ctr"/>
+                  <a:tcPr anchor="ctr">
+                    <a:lnR w="38100" cap="flat" cmpd="sng" algn="ctr">
+                      <a:solidFill>
+                        <a:schemeClr val="bg1"/>
+                      </a:solidFill>
+                      <a:prstDash val="solid"/>
+                      <a:round/>
+                      <a:headEnd type="none" w="med" len="med"/>
+                      <a:tailEnd type="none" w="med" len="med"/>
+                    </a:lnR>
+                  </a:tcPr>
                 </a:tc>
                 <a:tc>
                   <a:txBody>
@@ -4812,7 +4830,17 @@
                       <a:endParaRPr lang="hr-HR" sz="2400" dirty="0"/>
                     </a:p>
                   </a:txBody>
-                  <a:tcPr anchor="ctr"/>
+                  <a:tcPr anchor="ctr">
+                    <a:lnL w="38100" cap="flat" cmpd="sng" algn="ctr">
+                      <a:solidFill>
+                        <a:schemeClr val="bg1"/>
+                      </a:solidFill>
+                      <a:prstDash val="solid"/>
+                      <a:round/>
+                      <a:headEnd type="none" w="med" len="med"/>
+                      <a:tailEnd type="none" w="med" len="med"/>
+                    </a:lnL>
+                  </a:tcPr>
                 </a:tc>
                 <a:tc>
                   <a:txBody>
@@ -4822,12 +4850,56 @@
                       <a:pPr algn="ctr"/>
                       <a:r>
                         <a:rPr lang="en-US" sz="2400" dirty="0"/>
-                        <a:t>F1 score (%)</a:t>
+                        <a:t>4-fold validation threshold (%)</a:t>
                       </a:r>
                       <a:endParaRPr lang="hr-HR" sz="2400" dirty="0"/>
                     </a:p>
                   </a:txBody>
-                  <a:tcPr anchor="ctr"/>
+                  <a:tcPr anchor="ctr">
+                    <a:lnR w="38100" cap="flat" cmpd="sng" algn="ctr">
+                      <a:solidFill>
+                        <a:schemeClr val="bg1"/>
+                      </a:solidFill>
+                      <a:prstDash val="solid"/>
+                      <a:round/>
+                      <a:headEnd type="none" w="med" len="med"/>
+                      <a:tailEnd type="none" w="med" len="med"/>
+                    </a:lnR>
+                    <a:lnB w="38100" cap="flat" cmpd="sng" algn="ctr">
+                      <a:solidFill>
+                        <a:schemeClr val="bg1"/>
+                      </a:solidFill>
+                      <a:prstDash val="solid"/>
+                      <a:round/>
+                      <a:headEnd type="none" w="med" len="med"/>
+                      <a:tailEnd type="none" w="med" len="med"/>
+                    </a:lnB>
+                  </a:tcPr>
+                </a:tc>
+                <a:tc>
+                  <a:txBody>
+                    <a:bodyPr/>
+                    <a:lstStyle/>
+                    <a:p>
+                      <a:pPr algn="ctr"/>
+                      <a:r>
+                        <a:rPr lang="en-US" sz="2400" dirty="0"/>
+                        <a:t>F1 score (%)</a:t>
+                      </a:r>
+                      <a:endParaRPr lang="hr-HR" sz="2400" dirty="0"/>
+                    </a:p>
+                  </a:txBody>
+                  <a:tcPr anchor="ctr">
+                    <a:lnL w="38100" cap="flat" cmpd="sng" algn="ctr">
+                      <a:solidFill>
+                        <a:schemeClr val="bg1"/>
+                      </a:solidFill>
+                      <a:prstDash val="solid"/>
+                      <a:round/>
+                      <a:headEnd type="none" w="med" len="med"/>
+                      <a:tailEnd type="none" w="med" len="med"/>
+                    </a:lnL>
+                  </a:tcPr>
                 </a:tc>
                 <a:tc>
                   <a:txBody>
@@ -4879,7 +4951,17 @@
                       <a:endParaRPr lang="hr-HR" sz="2400" dirty="0"/>
                     </a:p>
                   </a:txBody>
-                  <a:tcPr anchor="ctr"/>
+                  <a:tcPr anchor="ctr">
+                    <a:lnB w="38100" cap="flat" cmpd="sng" algn="ctr">
+                      <a:solidFill>
+                        <a:schemeClr val="bg1"/>
+                      </a:solidFill>
+                      <a:prstDash val="solid"/>
+                      <a:round/>
+                      <a:headEnd type="none" w="med" len="med"/>
+                      <a:tailEnd type="none" w="med" len="med"/>
+                    </a:lnB>
+                  </a:tcPr>
                 </a:tc>
                 <a:tc>
                   <a:txBody>
@@ -4894,7 +4976,26 @@
                       <a:endParaRPr lang="hr-HR" sz="2400" dirty="0"/>
                     </a:p>
                   </a:txBody>
-                  <a:tcPr anchor="ctr"/>
+                  <a:tcPr anchor="ctr">
+                    <a:lnR w="38100" cap="flat" cmpd="sng" algn="ctr">
+                      <a:solidFill>
+                        <a:schemeClr val="bg1"/>
+                      </a:solidFill>
+                      <a:prstDash val="solid"/>
+                      <a:round/>
+                      <a:headEnd type="none" w="med" len="med"/>
+                      <a:tailEnd type="none" w="med" len="med"/>
+                    </a:lnR>
+                    <a:lnB w="38100" cap="flat" cmpd="sng" algn="ctr">
+                      <a:solidFill>
+                        <a:schemeClr val="bg1"/>
+                      </a:solidFill>
+                      <a:prstDash val="solid"/>
+                      <a:round/>
+                      <a:headEnd type="none" w="med" len="med"/>
+                      <a:tailEnd type="none" w="med" len="med"/>
+                    </a:lnB>
+                  </a:tcPr>
                 </a:tc>
                 <a:tc>
                   <a:txBody>
@@ -4903,8 +5004,42 @@
                     <a:p>
                       <a:pPr algn="ctr"/>
                       <a:r>
+                        <a:rPr lang="en-US" sz="2400" dirty="0"/>
+                        <a:t>10.4</a:t>
+                      </a:r>
+                      <a:endParaRPr lang="hr-HR" sz="2400" dirty="0"/>
+                    </a:p>
+                  </a:txBody>
+                  <a:tcPr anchor="ctr">
+                    <a:lnL w="38100" cap="flat" cmpd="sng" algn="ctr">
+                      <a:solidFill>
+                        <a:schemeClr val="bg1"/>
+                      </a:solidFill>
+                      <a:prstDash val="solid"/>
+                      <a:round/>
+                      <a:headEnd type="none" w="med" len="med"/>
+                      <a:tailEnd type="none" w="med" len="med"/>
+                    </a:lnL>
+                    <a:lnB w="38100" cap="flat" cmpd="sng" algn="ctr">
+                      <a:solidFill>
+                        <a:schemeClr val="bg1"/>
+                      </a:solidFill>
+                      <a:prstDash val="solid"/>
+                      <a:round/>
+                      <a:headEnd type="none" w="med" len="med"/>
+                      <a:tailEnd type="none" w="med" len="med"/>
+                    </a:lnB>
+                  </a:tcPr>
+                </a:tc>
+                <a:tc>
+                  <a:txBody>
+                    <a:bodyPr/>
+                    <a:lstStyle/>
+                    <a:p>
+                      <a:pPr algn="ctr"/>
+                      <a:r>
                         <a:rPr lang="hr-HR" sz="2400" dirty="0"/>
-                        <a:t>39.31 </a:t>
+                        <a:t>39.3 </a:t>
                       </a:r>
                       <a:r>
                         <a:rPr lang="hr-HR" sz="2400" b="0" i="0" kern="1200" dirty="0">
@@ -4920,11 +5055,39 @@
                       </a:r>
                       <a:r>
                         <a:rPr lang="hr-HR" sz="2400" dirty="0"/>
-                        <a:t> 25.61</a:t>
+                        <a:t> 25.6</a:t>
                       </a:r>
                     </a:p>
                   </a:txBody>
-                  <a:tcPr anchor="ctr"/>
+                  <a:tcPr anchor="ctr">
+                    <a:lnR w="38100" cap="flat" cmpd="sng" algn="ctr">
+                      <a:solidFill>
+                        <a:schemeClr val="bg1"/>
+                      </a:solidFill>
+                      <a:prstDash val="solid"/>
+                      <a:round/>
+                      <a:headEnd type="none" w="med" len="med"/>
+                      <a:tailEnd type="none" w="med" len="med"/>
+                    </a:lnR>
+                    <a:lnT w="38100" cap="flat" cmpd="sng" algn="ctr">
+                      <a:solidFill>
+                        <a:schemeClr val="bg1"/>
+                      </a:solidFill>
+                      <a:prstDash val="solid"/>
+                      <a:round/>
+                      <a:headEnd type="none" w="med" len="med"/>
+                      <a:tailEnd type="none" w="med" len="med"/>
+                    </a:lnT>
+                    <a:lnB w="38100" cap="flat" cmpd="sng" algn="ctr">
+                      <a:solidFill>
+                        <a:schemeClr val="bg1"/>
+                      </a:solidFill>
+                      <a:prstDash val="solid"/>
+                      <a:round/>
+                      <a:headEnd type="none" w="med" len="med"/>
+                      <a:tailEnd type="none" w="med" len="med"/>
+                    </a:lnB>
+                  </a:tcPr>
                 </a:tc>
                 <a:tc>
                   <a:txBody>
@@ -4934,7 +5097,7 @@
                       <a:pPr algn="ctr"/>
                       <a:r>
                         <a:rPr lang="hr-HR" sz="2400" dirty="0"/>
-                        <a:t>62.40 </a:t>
+                        <a:t>62.4 </a:t>
                       </a:r>
                       <a:r>
                         <a:rPr lang="hr-HR" sz="2400" b="0" i="0" kern="1200" dirty="0">
@@ -4950,11 +5113,30 @@
                       </a:r>
                       <a:r>
                         <a:rPr lang="hr-HR" sz="2400" dirty="0"/>
-                        <a:t> 5.73</a:t>
+                        <a:t> 5.7</a:t>
                       </a:r>
                     </a:p>
                   </a:txBody>
-                  <a:tcPr anchor="ctr"/>
+                  <a:tcPr anchor="ctr">
+                    <a:lnL w="38100" cap="flat" cmpd="sng" algn="ctr">
+                      <a:solidFill>
+                        <a:schemeClr val="bg1"/>
+                      </a:solidFill>
+                      <a:prstDash val="solid"/>
+                      <a:round/>
+                      <a:headEnd type="none" w="med" len="med"/>
+                      <a:tailEnd type="none" w="med" len="med"/>
+                    </a:lnL>
+                    <a:lnB w="38100" cap="flat" cmpd="sng" algn="ctr">
+                      <a:solidFill>
+                        <a:schemeClr val="bg1"/>
+                      </a:solidFill>
+                      <a:prstDash val="solid"/>
+                      <a:round/>
+                      <a:headEnd type="none" w="med" len="med"/>
+                      <a:tailEnd type="none" w="med" len="med"/>
+                    </a:lnB>
+                  </a:tcPr>
                 </a:tc>
                 <a:tc>
                   <a:txBody>
@@ -4964,7 +5146,7 @@
                       <a:pPr algn="ctr"/>
                       <a:r>
                         <a:rPr lang="hr-HR" sz="2400" b="0" dirty="0"/>
-                        <a:t>60.14 </a:t>
+                        <a:t>60.1 </a:t>
                       </a:r>
                       <a:r>
                         <a:rPr lang="hr-HR" sz="2400" b="0" i="0" kern="1200" dirty="0">
@@ -4980,11 +5162,21 @@
                       </a:r>
                       <a:r>
                         <a:rPr lang="hr-HR" sz="2400" b="0" dirty="0"/>
-                        <a:t> 15.50</a:t>
+                        <a:t> 15.5</a:t>
                       </a:r>
                     </a:p>
                   </a:txBody>
-                  <a:tcPr anchor="ctr"/>
+                  <a:tcPr anchor="ctr">
+                    <a:lnB w="38100" cap="flat" cmpd="sng" algn="ctr">
+                      <a:solidFill>
+                        <a:schemeClr val="bg1"/>
+                      </a:solidFill>
+                      <a:prstDash val="solid"/>
+                      <a:round/>
+                      <a:headEnd type="none" w="med" len="med"/>
+                      <a:tailEnd type="none" w="med" len="med"/>
+                    </a:lnB>
+                  </a:tcPr>
                 </a:tc>
                 <a:tc>
                   <a:txBody>
@@ -4993,8 +5185,12 @@
                     <a:p>
                       <a:pPr algn="ctr"/>
                       <a:r>
+                        <a:rPr lang="en-US" sz="2400" b="1" dirty="0"/>
+                        <a:t>70.0</a:t>
+                      </a:r>
+                      <a:r>
                         <a:rPr lang="hr-HR" sz="2400" b="1" dirty="0"/>
-                        <a:t>69.99 </a:t>
+                        <a:t> </a:t>
                       </a:r>
                       <a:r>
                         <a:rPr lang="hr-HR" sz="2400" b="1" i="0" kern="1200" dirty="0">
@@ -5010,11 +5206,21 @@
                       </a:r>
                       <a:r>
                         <a:rPr lang="hr-HR" sz="2400" b="1" dirty="0"/>
-                        <a:t> 8.53</a:t>
+                        <a:t> 8.5</a:t>
                       </a:r>
                     </a:p>
                   </a:txBody>
-                  <a:tcPr anchor="ctr"/>
+                  <a:tcPr anchor="ctr">
+                    <a:lnB w="38100" cap="flat" cmpd="sng" algn="ctr">
+                      <a:solidFill>
+                        <a:schemeClr val="bg1"/>
+                      </a:solidFill>
+                      <a:prstDash val="solid"/>
+                      <a:round/>
+                      <a:headEnd type="none" w="med" len="med"/>
+                      <a:tailEnd type="none" w="med" len="med"/>
+                    </a:lnB>
+                  </a:tcPr>
                 </a:tc>
                 <a:extLst>
                   <a:ext uri="{0D108BD9-81ED-4DB2-BD59-A6C34878D82A}">
@@ -5036,7 +5242,17 @@
                       <a:endParaRPr lang="hr-HR" sz="2400" dirty="0"/>
                     </a:p>
                   </a:txBody>
-                  <a:tcPr anchor="ctr"/>
+                  <a:tcPr anchor="ctr">
+                    <a:lnT w="38100" cap="flat" cmpd="sng" algn="ctr">
+                      <a:solidFill>
+                        <a:schemeClr val="bg1"/>
+                      </a:solidFill>
+                      <a:prstDash val="solid"/>
+                      <a:round/>
+                      <a:headEnd type="none" w="med" len="med"/>
+                      <a:tailEnd type="none" w="med" len="med"/>
+                    </a:lnT>
+                  </a:tcPr>
                 </a:tc>
                 <a:tc>
                   <a:txBody>
@@ -5051,7 +5267,26 @@
                       <a:endParaRPr lang="hr-HR" sz="2400" dirty="0"/>
                     </a:p>
                   </a:txBody>
-                  <a:tcPr anchor="ctr"/>
+                  <a:tcPr anchor="ctr">
+                    <a:lnR w="38100" cap="flat" cmpd="sng" algn="ctr">
+                      <a:solidFill>
+                        <a:schemeClr val="bg1"/>
+                      </a:solidFill>
+                      <a:prstDash val="solid"/>
+                      <a:round/>
+                      <a:headEnd type="none" w="med" len="med"/>
+                      <a:tailEnd type="none" w="med" len="med"/>
+                    </a:lnR>
+                    <a:lnT w="38100" cap="flat" cmpd="sng" algn="ctr">
+                      <a:solidFill>
+                        <a:schemeClr val="bg1"/>
+                      </a:solidFill>
+                      <a:prstDash val="solid"/>
+                      <a:round/>
+                      <a:headEnd type="none" w="med" len="med"/>
+                      <a:tailEnd type="none" w="med" len="med"/>
+                    </a:lnT>
+                  </a:tcPr>
                 </a:tc>
                 <a:tc>
                   <a:txBody>
@@ -5061,7 +5296,41 @@
                       <a:pPr algn="ctr"/>
                       <a:r>
                         <a:rPr lang="en-US" sz="2400" dirty="0"/>
-                        <a:t>7.55 </a:t>
+                        <a:t>3.6</a:t>
+                      </a:r>
+                      <a:endParaRPr lang="hr-HR" sz="2400" dirty="0"/>
+                    </a:p>
+                  </a:txBody>
+                  <a:tcPr anchor="ctr">
+                    <a:lnL w="38100" cap="flat" cmpd="sng" algn="ctr">
+                      <a:solidFill>
+                        <a:schemeClr val="bg1"/>
+                      </a:solidFill>
+                      <a:prstDash val="solid"/>
+                      <a:round/>
+                      <a:headEnd type="none" w="med" len="med"/>
+                      <a:tailEnd type="none" w="med" len="med"/>
+                    </a:lnL>
+                    <a:lnT w="38100" cap="flat" cmpd="sng" algn="ctr">
+                      <a:solidFill>
+                        <a:schemeClr val="bg1"/>
+                      </a:solidFill>
+                      <a:prstDash val="solid"/>
+                      <a:round/>
+                      <a:headEnd type="none" w="med" len="med"/>
+                      <a:tailEnd type="none" w="med" len="med"/>
+                    </a:lnT>
+                  </a:tcPr>
+                </a:tc>
+                <a:tc>
+                  <a:txBody>
+                    <a:bodyPr/>
+                    <a:lstStyle/>
+                    <a:p>
+                      <a:pPr algn="ctr"/>
+                      <a:r>
+                        <a:rPr lang="en-US" sz="2400" dirty="0"/>
+                        <a:t>7.6 </a:t>
                       </a:r>
                       <a:r>
                         <a:rPr lang="hr-HR" sz="2400" b="0" i="0" kern="1200" dirty="0">
@@ -5077,12 +5346,31 @@
                       </a:r>
                       <a:r>
                         <a:rPr lang="en-US" sz="2400" dirty="0"/>
-                        <a:t> 6.11</a:t>
+                        <a:t> 6.1</a:t>
                       </a:r>
                       <a:endParaRPr lang="hr-HR" sz="2400" dirty="0"/>
                     </a:p>
                   </a:txBody>
-                  <a:tcPr anchor="ctr"/>
+                  <a:tcPr anchor="ctr">
+                    <a:lnR w="38100" cap="flat" cmpd="sng" algn="ctr">
+                      <a:solidFill>
+                        <a:schemeClr val="bg1"/>
+                      </a:solidFill>
+                      <a:prstDash val="solid"/>
+                      <a:round/>
+                      <a:headEnd type="none" w="med" len="med"/>
+                      <a:tailEnd type="none" w="med" len="med"/>
+                    </a:lnR>
+                    <a:lnT w="38100" cap="flat" cmpd="sng" algn="ctr">
+                      <a:solidFill>
+                        <a:schemeClr val="bg1"/>
+                      </a:solidFill>
+                      <a:prstDash val="solid"/>
+                      <a:round/>
+                      <a:headEnd type="none" w="med" len="med"/>
+                      <a:tailEnd type="none" w="med" len="med"/>
+                    </a:lnT>
+                  </a:tcPr>
                 </a:tc>
                 <a:tc>
                   <a:txBody>
@@ -5092,7 +5380,7 @@
                       <a:pPr algn="ctr"/>
                       <a:r>
                         <a:rPr lang="en-US" sz="2400" dirty="0"/>
-                        <a:t>51.98 </a:t>
+                        <a:t>52.0 </a:t>
                       </a:r>
                       <a:r>
                         <a:rPr lang="hr-HR" sz="2400" b="0" i="0" kern="1200" dirty="0">
@@ -5108,12 +5396,31 @@
                       </a:r>
                       <a:r>
                         <a:rPr lang="en-US" sz="2400" dirty="0"/>
-                        <a:t> 4.55</a:t>
+                        <a:t> 4.6</a:t>
                       </a:r>
                       <a:endParaRPr lang="hr-HR" sz="2400" dirty="0"/>
                     </a:p>
                   </a:txBody>
-                  <a:tcPr anchor="ctr"/>
+                  <a:tcPr anchor="ctr">
+                    <a:lnL w="38100" cap="flat" cmpd="sng" algn="ctr">
+                      <a:solidFill>
+                        <a:schemeClr val="bg1"/>
+                      </a:solidFill>
+                      <a:prstDash val="solid"/>
+                      <a:round/>
+                      <a:headEnd type="none" w="med" len="med"/>
+                      <a:tailEnd type="none" w="med" len="med"/>
+                    </a:lnL>
+                    <a:lnT w="38100" cap="flat" cmpd="sng" algn="ctr">
+                      <a:solidFill>
+                        <a:schemeClr val="bg1"/>
+                      </a:solidFill>
+                      <a:prstDash val="solid"/>
+                      <a:round/>
+                      <a:headEnd type="none" w="med" len="med"/>
+                      <a:tailEnd type="none" w="med" len="med"/>
+                    </a:lnT>
+                  </a:tcPr>
                 </a:tc>
                 <a:tc>
                   <a:txBody>
@@ -5123,7 +5430,7 @@
                       <a:pPr algn="ctr"/>
                       <a:r>
                         <a:rPr lang="en-US" sz="2400" b="0" dirty="0"/>
-                        <a:t>65.79 </a:t>
+                        <a:t>65.8 </a:t>
                       </a:r>
                       <a:r>
                         <a:rPr lang="hr-HR" sz="2400" b="0" i="0" kern="1200" dirty="0">
@@ -5139,12 +5446,22 @@
                       </a:r>
                       <a:r>
                         <a:rPr lang="en-US" sz="2400" b="0" dirty="0"/>
-                        <a:t> 23.49</a:t>
+                        <a:t> 23.5</a:t>
                       </a:r>
                       <a:endParaRPr lang="hr-HR" sz="2400" b="0" dirty="0"/>
                     </a:p>
                   </a:txBody>
-                  <a:tcPr anchor="ctr"/>
+                  <a:tcPr anchor="ctr">
+                    <a:lnT w="38100" cap="flat" cmpd="sng" algn="ctr">
+                      <a:solidFill>
+                        <a:schemeClr val="bg1"/>
+                      </a:solidFill>
+                      <a:prstDash val="solid"/>
+                      <a:round/>
+                      <a:headEnd type="none" w="med" len="med"/>
+                      <a:tailEnd type="none" w="med" len="med"/>
+                    </a:lnT>
+                  </a:tcPr>
                 </a:tc>
                 <a:tc>
                   <a:txBody>
@@ -5154,7 +5471,7 @@
                       <a:pPr algn="ctr"/>
                       <a:r>
                         <a:rPr lang="en-US" sz="2400" dirty="0"/>
-                        <a:t>49.65 </a:t>
+                        <a:t>49.7 </a:t>
                       </a:r>
                       <a:r>
                         <a:rPr lang="hr-HR" sz="2400" b="0" i="0" kern="1200" dirty="0">
@@ -5170,12 +5487,22 @@
                       </a:r>
                       <a:r>
                         <a:rPr lang="en-US" sz="2400" dirty="0"/>
-                        <a:t> 12.26</a:t>
+                        <a:t> 12.3</a:t>
                       </a:r>
                       <a:endParaRPr lang="hr-HR" sz="2400" dirty="0"/>
                     </a:p>
                   </a:txBody>
-                  <a:tcPr anchor="ctr"/>
+                  <a:tcPr anchor="ctr">
+                    <a:lnT w="38100" cap="flat" cmpd="sng" algn="ctr">
+                      <a:solidFill>
+                        <a:schemeClr val="bg1"/>
+                      </a:solidFill>
+                      <a:prstDash val="solid"/>
+                      <a:round/>
+                      <a:headEnd type="none" w="med" len="med"/>
+                      <a:tailEnd type="none" w="med" len="med"/>
+                    </a:lnT>
+                  </a:tcPr>
                 </a:tc>
                 <a:extLst>
                   <a:ext uri="{0D108BD9-81ED-4DB2-BD59-A6C34878D82A}">
@@ -5197,7 +5524,17 @@
                       <a:endParaRPr lang="hr-HR" sz="2400" dirty="0"/>
                     </a:p>
                   </a:txBody>
-                  <a:tcPr anchor="ctr"/>
+                  <a:tcPr anchor="ctr">
+                    <a:lnB w="38100" cap="flat" cmpd="sng" algn="ctr">
+                      <a:solidFill>
+                        <a:schemeClr val="bg1"/>
+                      </a:solidFill>
+                      <a:prstDash val="solid"/>
+                      <a:round/>
+                      <a:headEnd type="none" w="med" len="med"/>
+                      <a:tailEnd type="none" w="med" len="med"/>
+                    </a:lnB>
+                  </a:tcPr>
                 </a:tc>
                 <a:tc>
                   <a:txBody>
@@ -5212,7 +5549,26 @@
                       <a:endParaRPr lang="hr-HR" sz="2400" dirty="0"/>
                     </a:p>
                   </a:txBody>
-                  <a:tcPr anchor="ctr"/>
+                  <a:tcPr anchor="ctr">
+                    <a:lnR w="38100" cap="flat" cmpd="sng" algn="ctr">
+                      <a:solidFill>
+                        <a:schemeClr val="bg1"/>
+                      </a:solidFill>
+                      <a:prstDash val="solid"/>
+                      <a:round/>
+                      <a:headEnd type="none" w="med" len="med"/>
+                      <a:tailEnd type="none" w="med" len="med"/>
+                    </a:lnR>
+                    <a:lnB w="38100" cap="flat" cmpd="sng" algn="ctr">
+                      <a:solidFill>
+                        <a:schemeClr val="bg1"/>
+                      </a:solidFill>
+                      <a:prstDash val="solid"/>
+                      <a:round/>
+                      <a:headEnd type="none" w="med" len="med"/>
+                      <a:tailEnd type="none" w="med" len="med"/>
+                    </a:lnB>
+                  </a:tcPr>
                 </a:tc>
                 <a:tc>
                   <a:txBody>
@@ -5222,7 +5578,41 @@
                       <a:pPr algn="ctr"/>
                       <a:r>
                         <a:rPr lang="en-US" sz="2400" dirty="0"/>
-                        <a:t>3.96 </a:t>
+                        <a:t>4.0</a:t>
+                      </a:r>
+                      <a:endParaRPr lang="hr-HR" sz="2400" dirty="0"/>
+                    </a:p>
+                  </a:txBody>
+                  <a:tcPr anchor="ctr">
+                    <a:lnL w="38100" cap="flat" cmpd="sng" algn="ctr">
+                      <a:solidFill>
+                        <a:schemeClr val="bg1"/>
+                      </a:solidFill>
+                      <a:prstDash val="solid"/>
+                      <a:round/>
+                      <a:headEnd type="none" w="med" len="med"/>
+                      <a:tailEnd type="none" w="med" len="med"/>
+                    </a:lnL>
+                    <a:lnB w="38100" cap="flat" cmpd="sng" algn="ctr">
+                      <a:solidFill>
+                        <a:schemeClr val="bg1"/>
+                      </a:solidFill>
+                      <a:prstDash val="solid"/>
+                      <a:round/>
+                      <a:headEnd type="none" w="med" len="med"/>
+                      <a:tailEnd type="none" w="med" len="med"/>
+                    </a:lnB>
+                  </a:tcPr>
+                </a:tc>
+                <a:tc>
+                  <a:txBody>
+                    <a:bodyPr/>
+                    <a:lstStyle/>
+                    <a:p>
+                      <a:pPr algn="ctr"/>
+                      <a:r>
+                        <a:rPr lang="en-US" sz="2400" dirty="0"/>
+                        <a:t>4.0 </a:t>
                       </a:r>
                       <a:r>
                         <a:rPr lang="hr-HR" sz="2400" b="0" i="0" kern="1200" dirty="0">
@@ -5238,12 +5628,31 @@
                       </a:r>
                       <a:r>
                         <a:rPr lang="en-US" sz="2400" dirty="0"/>
-                        <a:t> 0.11</a:t>
+                        <a:t> 0.1</a:t>
                       </a:r>
                       <a:endParaRPr lang="hr-HR" sz="2400" dirty="0"/>
                     </a:p>
                   </a:txBody>
-                  <a:tcPr anchor="ctr"/>
+                  <a:tcPr anchor="ctr">
+                    <a:lnR w="38100" cap="flat" cmpd="sng" algn="ctr">
+                      <a:solidFill>
+                        <a:schemeClr val="bg1"/>
+                      </a:solidFill>
+                      <a:prstDash val="solid"/>
+                      <a:round/>
+                      <a:headEnd type="none" w="med" len="med"/>
+                      <a:tailEnd type="none" w="med" len="med"/>
+                    </a:lnR>
+                    <a:lnB w="38100" cap="flat" cmpd="sng" algn="ctr">
+                      <a:solidFill>
+                        <a:schemeClr val="bg1"/>
+                      </a:solidFill>
+                      <a:prstDash val="solid"/>
+                      <a:round/>
+                      <a:headEnd type="none" w="med" len="med"/>
+                      <a:tailEnd type="none" w="med" len="med"/>
+                    </a:lnB>
+                  </a:tcPr>
                 </a:tc>
                 <a:tc>
                   <a:txBody>
@@ -5253,7 +5662,7 @@
                       <a:pPr algn="ctr"/>
                       <a:r>
                         <a:rPr lang="en-US" sz="2400" dirty="0"/>
-                        <a:t>59.53 </a:t>
+                        <a:t>59.5 </a:t>
                       </a:r>
                       <a:r>
                         <a:rPr lang="hr-HR" sz="2400" b="0" i="0" kern="1200" dirty="0">
@@ -5269,12 +5678,31 @@
                       </a:r>
                       <a:r>
                         <a:rPr lang="en-US" sz="2400" dirty="0"/>
-                        <a:t> 3.81</a:t>
+                        <a:t> 3.8</a:t>
                       </a:r>
                       <a:endParaRPr lang="hr-HR" sz="2400" dirty="0"/>
                     </a:p>
                   </a:txBody>
-                  <a:tcPr anchor="ctr"/>
+                  <a:tcPr anchor="ctr">
+                    <a:lnL w="38100" cap="flat" cmpd="sng" algn="ctr">
+                      <a:solidFill>
+                        <a:schemeClr val="bg1"/>
+                      </a:solidFill>
+                      <a:prstDash val="solid"/>
+                      <a:round/>
+                      <a:headEnd type="none" w="med" len="med"/>
+                      <a:tailEnd type="none" w="med" len="med"/>
+                    </a:lnL>
+                    <a:lnB w="38100" cap="flat" cmpd="sng" algn="ctr">
+                      <a:solidFill>
+                        <a:schemeClr val="bg1"/>
+                      </a:solidFill>
+                      <a:prstDash val="solid"/>
+                      <a:round/>
+                      <a:headEnd type="none" w="med" len="med"/>
+                      <a:tailEnd type="none" w="med" len="med"/>
+                    </a:lnB>
+                  </a:tcPr>
                 </a:tc>
                 <a:tc>
                   <a:txBody>
@@ -5284,7 +5712,7 @@
                       <a:pPr algn="ctr"/>
                       <a:r>
                         <a:rPr lang="en-US" sz="2400" b="1" dirty="0"/>
-                        <a:t>85.22 </a:t>
+                        <a:t>85.2 </a:t>
                       </a:r>
                       <a:r>
                         <a:rPr lang="hr-HR" sz="2400" b="1" i="0" kern="1200" dirty="0">
@@ -5300,12 +5728,22 @@
                       </a:r>
                       <a:r>
                         <a:rPr lang="en-US" sz="2400" b="1" dirty="0"/>
-                        <a:t> 13.28</a:t>
+                        <a:t> 13.3</a:t>
                       </a:r>
                       <a:endParaRPr lang="hr-HR" sz="2400" b="1" dirty="0"/>
                     </a:p>
                   </a:txBody>
-                  <a:tcPr anchor="ctr"/>
+                  <a:tcPr anchor="ctr">
+                    <a:lnB w="38100" cap="flat" cmpd="sng" algn="ctr">
+                      <a:solidFill>
+                        <a:schemeClr val="bg1"/>
+                      </a:solidFill>
+                      <a:prstDash val="solid"/>
+                      <a:round/>
+                      <a:headEnd type="none" w="med" len="med"/>
+                      <a:tailEnd type="none" w="med" len="med"/>
+                    </a:lnB>
+                  </a:tcPr>
                 </a:tc>
                 <a:tc>
                   <a:txBody>
@@ -5315,7 +5753,7 @@
                       <a:pPr algn="ctr"/>
                       <a:r>
                         <a:rPr lang="en-US" sz="2400" dirty="0"/>
-                        <a:t>46.28 </a:t>
+                        <a:t>46.3 </a:t>
                       </a:r>
                       <a:r>
                         <a:rPr lang="hr-HR" sz="2400" b="0" i="0" kern="1200" dirty="0">
@@ -5331,12 +5769,22 @@
                       </a:r>
                       <a:r>
                         <a:rPr lang="en-US" sz="2400" dirty="0"/>
-                        <a:t> 2.16</a:t>
+                        <a:t> 2.2</a:t>
                       </a:r>
                       <a:endParaRPr lang="hr-HR" sz="2400" dirty="0"/>
                     </a:p>
                   </a:txBody>
-                  <a:tcPr anchor="ctr"/>
+                  <a:tcPr anchor="ctr">
+                    <a:lnB w="38100" cap="flat" cmpd="sng" algn="ctr">
+                      <a:solidFill>
+                        <a:schemeClr val="bg1"/>
+                      </a:solidFill>
+                      <a:prstDash val="solid"/>
+                      <a:round/>
+                      <a:headEnd type="none" w="med" len="med"/>
+                      <a:tailEnd type="none" w="med" len="med"/>
+                    </a:lnB>
+                  </a:tcPr>
                 </a:tc>
                 <a:extLst>
                   <a:ext uri="{0D108BD9-81ED-4DB2-BD59-A6C34878D82A}">
@@ -5358,7 +5806,17 @@
                       <a:endParaRPr lang="hr-HR" sz="2400" dirty="0"/>
                     </a:p>
                   </a:txBody>
-                  <a:tcPr anchor="ctr"/>
+                  <a:tcPr anchor="ctr">
+                    <a:lnT w="38100" cap="flat" cmpd="sng" algn="ctr">
+                      <a:solidFill>
+                        <a:schemeClr val="bg1"/>
+                      </a:solidFill>
+                      <a:prstDash val="solid"/>
+                      <a:round/>
+                      <a:headEnd type="none" w="med" len="med"/>
+                      <a:tailEnd type="none" w="med" len="med"/>
+                    </a:lnT>
+                  </a:tcPr>
                 </a:tc>
                 <a:tc>
                   <a:txBody>
@@ -5373,7 +5831,26 @@
                       <a:endParaRPr lang="hr-HR" sz="2400" dirty="0"/>
                     </a:p>
                   </a:txBody>
-                  <a:tcPr anchor="ctr"/>
+                  <a:tcPr anchor="ctr">
+                    <a:lnR w="38100" cap="flat" cmpd="sng" algn="ctr">
+                      <a:solidFill>
+                        <a:schemeClr val="bg1"/>
+                      </a:solidFill>
+                      <a:prstDash val="solid"/>
+                      <a:round/>
+                      <a:headEnd type="none" w="med" len="med"/>
+                      <a:tailEnd type="none" w="med" len="med"/>
+                    </a:lnR>
+                    <a:lnT w="38100" cap="flat" cmpd="sng" algn="ctr">
+                      <a:solidFill>
+                        <a:schemeClr val="bg1"/>
+                      </a:solidFill>
+                      <a:prstDash val="solid"/>
+                      <a:round/>
+                      <a:headEnd type="none" w="med" len="med"/>
+                      <a:tailEnd type="none" w="med" len="med"/>
+                    </a:lnT>
+                  </a:tcPr>
                 </a:tc>
                 <a:tc>
                   <a:txBody>
@@ -5382,8 +5859,42 @@
                     <a:p>
                       <a:pPr algn="ctr"/>
                       <a:r>
+                        <a:rPr lang="en-US" sz="2400" dirty="0"/>
+                        <a:t>8.4</a:t>
+                      </a:r>
+                      <a:endParaRPr lang="hr-HR" sz="2400" dirty="0"/>
+                    </a:p>
+                  </a:txBody>
+                  <a:tcPr anchor="ctr">
+                    <a:lnL w="38100" cap="flat" cmpd="sng" algn="ctr">
+                      <a:solidFill>
+                        <a:schemeClr val="bg1"/>
+                      </a:solidFill>
+                      <a:prstDash val="solid"/>
+                      <a:round/>
+                      <a:headEnd type="none" w="med" len="med"/>
+                      <a:tailEnd type="none" w="med" len="med"/>
+                    </a:lnL>
+                    <a:lnT w="38100" cap="flat" cmpd="sng" algn="ctr">
+                      <a:solidFill>
+                        <a:schemeClr val="bg1"/>
+                      </a:solidFill>
+                      <a:prstDash val="solid"/>
+                      <a:round/>
+                      <a:headEnd type="none" w="med" len="med"/>
+                      <a:tailEnd type="none" w="med" len="med"/>
+                    </a:lnT>
+                  </a:tcPr>
+                </a:tc>
+                <a:tc>
+                  <a:txBody>
+                    <a:bodyPr/>
+                    <a:lstStyle/>
+                    <a:p>
+                      <a:pPr algn="ctr"/>
+                      <a:r>
                         <a:rPr lang="hr-HR" sz="2400" dirty="0"/>
-                        <a:t>18.94 </a:t>
+                        <a:t>18.9 </a:t>
                       </a:r>
                       <a:r>
                         <a:rPr lang="hr-HR" sz="2400" b="0" i="0" kern="1200" dirty="0">
@@ -5399,11 +5910,35 @@
                       </a:r>
                       <a:r>
                         <a:rPr lang="hr-HR" sz="2400" dirty="0"/>
-                        <a:t> 15.35</a:t>
-                      </a:r>
+                        <a:t> 15.</a:t>
+                      </a:r>
+                      <a:r>
+                        <a:rPr lang="en-US" sz="2400" dirty="0"/>
+                        <a:t>4</a:t>
+                      </a:r>
+                      <a:endParaRPr lang="hr-HR" sz="2400" dirty="0"/>
                     </a:p>
                   </a:txBody>
-                  <a:tcPr anchor="ctr"/>
+                  <a:tcPr anchor="ctr">
+                    <a:lnR w="38100" cap="flat" cmpd="sng" algn="ctr">
+                      <a:solidFill>
+                        <a:schemeClr val="bg1"/>
+                      </a:solidFill>
+                      <a:prstDash val="solid"/>
+                      <a:round/>
+                      <a:headEnd type="none" w="med" len="med"/>
+                      <a:tailEnd type="none" w="med" len="med"/>
+                    </a:lnR>
+                    <a:lnT w="38100" cap="flat" cmpd="sng" algn="ctr">
+                      <a:solidFill>
+                        <a:schemeClr val="bg1"/>
+                      </a:solidFill>
+                      <a:prstDash val="solid"/>
+                      <a:round/>
+                      <a:headEnd type="none" w="med" len="med"/>
+                      <a:tailEnd type="none" w="med" len="med"/>
+                    </a:lnT>
+                  </a:tcPr>
                 </a:tc>
                 <a:tc>
                   <a:txBody>
@@ -5413,7 +5948,7 @@
                       <a:pPr algn="ctr"/>
                       <a:r>
                         <a:rPr lang="hr-HR" sz="2400" b="1" dirty="0"/>
-                        <a:t>65.64 </a:t>
+                        <a:t>65.6 </a:t>
                       </a:r>
                       <a:r>
                         <a:rPr lang="hr-HR" sz="2400" b="1" i="0" kern="1200" dirty="0">
@@ -5429,11 +5964,30 @@
                       </a:r>
                       <a:r>
                         <a:rPr lang="hr-HR" sz="2400" b="1" dirty="0"/>
-                        <a:t> 4.12</a:t>
+                        <a:t> 4.1</a:t>
                       </a:r>
                     </a:p>
                   </a:txBody>
-                  <a:tcPr anchor="ctr"/>
+                  <a:tcPr anchor="ctr">
+                    <a:lnL w="38100" cap="flat" cmpd="sng" algn="ctr">
+                      <a:solidFill>
+                        <a:schemeClr val="bg1"/>
+                      </a:solidFill>
+                      <a:prstDash val="solid"/>
+                      <a:round/>
+                      <a:headEnd type="none" w="med" len="med"/>
+                      <a:tailEnd type="none" w="med" len="med"/>
+                    </a:lnL>
+                    <a:lnT w="38100" cap="flat" cmpd="sng" algn="ctr">
+                      <a:solidFill>
+                        <a:schemeClr val="bg1"/>
+                      </a:solidFill>
+                      <a:prstDash val="solid"/>
+                      <a:round/>
+                      <a:headEnd type="none" w="med" len="med"/>
+                      <a:tailEnd type="none" w="med" len="med"/>
+                    </a:lnT>
+                  </a:tcPr>
                 </a:tc>
                 <a:tc>
                   <a:txBody>
@@ -5443,7 +5997,15 @@
                       <a:pPr algn="ctr"/>
                       <a:r>
                         <a:rPr lang="hr-HR" sz="2400" dirty="0"/>
-                        <a:t> 78.49 </a:t>
+                        <a:t> 78.</a:t>
+                      </a:r>
+                      <a:r>
+                        <a:rPr lang="en-US" sz="2400" dirty="0"/>
+                        <a:t>5</a:t>
+                      </a:r>
+                      <a:r>
+                        <a:rPr lang="hr-HR" sz="2400" dirty="0"/>
+                        <a:t> </a:t>
                       </a:r>
                       <a:r>
                         <a:rPr lang="hr-HR" sz="2400" b="0" i="0" kern="1200" dirty="0">
@@ -5459,11 +6021,21 @@
                       </a:r>
                       <a:r>
                         <a:rPr lang="hr-HR" sz="2400" dirty="0"/>
-                        <a:t> 15.41</a:t>
+                        <a:t> 15.4</a:t>
                       </a:r>
                     </a:p>
                   </a:txBody>
-                  <a:tcPr anchor="ctr"/>
+                  <a:tcPr anchor="ctr">
+                    <a:lnT w="38100" cap="flat" cmpd="sng" algn="ctr">
+                      <a:solidFill>
+                        <a:schemeClr val="bg1"/>
+                      </a:solidFill>
+                      <a:prstDash val="solid"/>
+                      <a:round/>
+                      <a:headEnd type="none" w="med" len="med"/>
+                      <a:tailEnd type="none" w="med" len="med"/>
+                    </a:lnT>
+                  </a:tcPr>
                 </a:tc>
                 <a:tc>
                   <a:txBody>
@@ -5473,7 +6045,7 @@
                       <a:pPr algn="ctr"/>
                       <a:r>
                         <a:rPr lang="hr-HR" sz="2400" dirty="0"/>
-                        <a:t>58.72 </a:t>
+                        <a:t>58.7 </a:t>
                       </a:r>
                       <a:r>
                         <a:rPr lang="hr-HR" sz="2400" b="0" i="0" kern="1200" dirty="0">
@@ -5489,11 +6061,26 @@
                       </a:r>
                       <a:r>
                         <a:rPr lang="hr-HR" sz="2400" dirty="0"/>
-                        <a:t> 7.47</a:t>
-                      </a:r>
+                        <a:t> 7.</a:t>
+                      </a:r>
+                      <a:r>
+                        <a:rPr lang="en-US" sz="2400" dirty="0"/>
+                        <a:t>5</a:t>
+                      </a:r>
+                      <a:endParaRPr lang="hr-HR" sz="2400" dirty="0"/>
                     </a:p>
                   </a:txBody>
-                  <a:tcPr anchor="ctr"/>
+                  <a:tcPr anchor="ctr">
+                    <a:lnT w="38100" cap="flat" cmpd="sng" algn="ctr">
+                      <a:solidFill>
+                        <a:schemeClr val="bg1"/>
+                      </a:solidFill>
+                      <a:prstDash val="solid"/>
+                      <a:round/>
+                      <a:headEnd type="none" w="med" len="med"/>
+                      <a:tailEnd type="none" w="med" len="med"/>
+                    </a:lnT>
+                  </a:tcPr>
                 </a:tc>
                 <a:extLst>
                   <a:ext uri="{0D108BD9-81ED-4DB2-BD59-A6C34878D82A}">
@@ -5530,7 +6117,17 @@
                       <a:endParaRPr lang="hr-HR" sz="2400" dirty="0"/>
                     </a:p>
                   </a:txBody>
-                  <a:tcPr anchor="ctr"/>
+                  <a:tcPr anchor="ctr">
+                    <a:lnR w="38100" cap="flat" cmpd="sng" algn="ctr">
+                      <a:solidFill>
+                        <a:schemeClr val="bg1"/>
+                      </a:solidFill>
+                      <a:prstDash val="solid"/>
+                      <a:round/>
+                      <a:headEnd type="none" w="med" len="med"/>
+                      <a:tailEnd type="none" w="med" len="med"/>
+                    </a:lnR>
+                  </a:tcPr>
                 </a:tc>
                 <a:tc>
                   <a:txBody>
@@ -5540,7 +6137,32 @@
                       <a:pPr algn="ctr"/>
                       <a:r>
                         <a:rPr lang="en-US" sz="2400" dirty="0"/>
-                        <a:t>12.29 </a:t>
+                        <a:t>6.3</a:t>
+                      </a:r>
+                      <a:endParaRPr lang="hr-HR" sz="2400" dirty="0"/>
+                    </a:p>
+                  </a:txBody>
+                  <a:tcPr anchor="ctr">
+                    <a:lnL w="38100" cap="flat" cmpd="sng" algn="ctr">
+                      <a:solidFill>
+                        <a:schemeClr val="bg1"/>
+                      </a:solidFill>
+                      <a:prstDash val="solid"/>
+                      <a:round/>
+                      <a:headEnd type="none" w="med" len="med"/>
+                      <a:tailEnd type="none" w="med" len="med"/>
+                    </a:lnL>
+                  </a:tcPr>
+                </a:tc>
+                <a:tc>
+                  <a:txBody>
+                    <a:bodyPr/>
+                    <a:lstStyle/>
+                    <a:p>
+                      <a:pPr algn="ctr"/>
+                      <a:r>
+                        <a:rPr lang="en-US" sz="2400" dirty="0"/>
+                        <a:t>12.3 </a:t>
                       </a:r>
                       <a:r>
                         <a:rPr lang="hr-HR" sz="2400" b="0" i="0" kern="1200" dirty="0">
@@ -5556,7 +6178,89 @@
                       </a:r>
                       <a:r>
                         <a:rPr lang="en-US" sz="2400" dirty="0"/>
-                        <a:t> 10.17</a:t>
+                        <a:t> 10.2</a:t>
+                      </a:r>
+                      <a:endParaRPr lang="hr-HR" sz="2400" dirty="0"/>
+                    </a:p>
+                  </a:txBody>
+                  <a:tcPr anchor="ctr">
+                    <a:lnR w="38100" cap="flat" cmpd="sng" algn="ctr">
+                      <a:solidFill>
+                        <a:schemeClr val="bg1"/>
+                      </a:solidFill>
+                      <a:prstDash val="solid"/>
+                      <a:round/>
+                      <a:headEnd type="none" w="med" len="med"/>
+                      <a:tailEnd type="none" w="med" len="med"/>
+                    </a:lnR>
+                  </a:tcPr>
+                </a:tc>
+                <a:tc>
+                  <a:txBody>
+                    <a:bodyPr/>
+                    <a:lstStyle/>
+                    <a:p>
+                      <a:pPr algn="ctr"/>
+                      <a:r>
+                        <a:rPr lang="en-US" sz="2400" b="0" dirty="0"/>
+                        <a:t>59.2 </a:t>
+                      </a:r>
+                      <a:r>
+                        <a:rPr lang="hr-HR" sz="2400" b="0" i="0" kern="1200" dirty="0">
+                          <a:solidFill>
+                            <a:schemeClr val="dk1"/>
+                          </a:solidFill>
+                          <a:effectLst/>
+                          <a:latin typeface="+mn-lt"/>
+                          <a:ea typeface="+mn-ea"/>
+                          <a:cs typeface="+mn-cs"/>
+                        </a:rPr>
+                        <a:t>±</a:t>
+                      </a:r>
+                      <a:r>
+                        <a:rPr lang="en-US" sz="2400" b="0" dirty="0"/>
+                        <a:t> 8.6</a:t>
+                      </a:r>
+                      <a:endParaRPr lang="hr-HR" sz="2400" b="0" dirty="0"/>
+                    </a:p>
+                  </a:txBody>
+                  <a:tcPr anchor="ctr">
+                    <a:lnL w="38100" cap="flat" cmpd="sng" algn="ctr">
+                      <a:solidFill>
+                        <a:schemeClr val="bg1"/>
+                      </a:solidFill>
+                      <a:prstDash val="solid"/>
+                      <a:round/>
+                      <a:headEnd type="none" w="med" len="med"/>
+                      <a:tailEnd type="none" w="med" len="med"/>
+                    </a:lnL>
+                  </a:tcPr>
+                </a:tc>
+                <a:tc>
+                  <a:txBody>
+                    <a:bodyPr/>
+                    <a:lstStyle/>
+                    <a:p>
+                      <a:pPr algn="ctr"/>
+                      <a:r>
+                        <a:rPr lang="en-US" sz="2400" dirty="0"/>
+                        <a:t>62.5 </a:t>
+                      </a:r>
+                      <a:r>
+                        <a:rPr lang="hr-HR" sz="2400" b="0" i="0" kern="1200" dirty="0">
+                          <a:solidFill>
+                            <a:schemeClr val="dk1"/>
+                          </a:solidFill>
+                          <a:effectLst/>
+                          <a:latin typeface="+mn-lt"/>
+                          <a:ea typeface="+mn-ea"/>
+                          <a:cs typeface="+mn-cs"/>
+                        </a:rPr>
+                        <a:t>±</a:t>
+                      </a:r>
+                      <a:r>
+                        <a:rPr lang="en-US" sz="2400" dirty="0"/>
+                        <a:t> 21.6</a:t>
                       </a:r>
                       <a:endParaRPr lang="hr-HR" sz="2400" dirty="0"/>
                     </a:p>
@@ -5571,7 +6275,7 @@
                       <a:pPr algn="ctr"/>
                       <a:r>
                         <a:rPr lang="en-US" sz="2400" b="0" dirty="0"/>
-                        <a:t>59.17 </a:t>
+                        <a:t>67.5 </a:t>
                       </a:r>
                       <a:r>
                         <a:rPr lang="hr-HR" sz="2400" b="0" i="0" kern="1200" dirty="0">
@@ -5587,69 +6291,7 @@
                       </a:r>
                       <a:r>
                         <a:rPr lang="en-US" sz="2400" b="0" dirty="0"/>
-                        <a:t> 8.58</a:t>
-                      </a:r>
-                      <a:endParaRPr lang="hr-HR" sz="2400" b="0" dirty="0"/>
-                    </a:p>
-                  </a:txBody>
-                  <a:tcPr anchor="ctr"/>
-                </a:tc>
-                <a:tc>
-                  <a:txBody>
-                    <a:bodyPr/>
-                    <a:lstStyle/>
-                    <a:p>
-                      <a:pPr algn="ctr"/>
-                      <a:r>
-                        <a:rPr lang="en-US" sz="2400" dirty="0"/>
-                        <a:t>62.51 </a:t>
-                      </a:r>
-                      <a:r>
-                        <a:rPr lang="hr-HR" sz="2400" b="0" i="0" kern="1200" dirty="0">
-                          <a:solidFill>
-                            <a:schemeClr val="dk1"/>
-                          </a:solidFill>
-                          <a:effectLst/>
-                          <a:latin typeface="+mn-lt"/>
-                          <a:ea typeface="+mn-ea"/>
-                          <a:cs typeface="+mn-cs"/>
-                        </a:rPr>
-                        <a:t>±</a:t>
-                      </a:r>
-                      <a:r>
-                        <a:rPr lang="en-US" sz="2400" dirty="0"/>
-                        <a:t> 21.63</a:t>
-                      </a:r>
-                      <a:endParaRPr lang="hr-HR" sz="2400" dirty="0"/>
-                    </a:p>
-                  </a:txBody>
-                  <a:tcPr anchor="ctr"/>
-                </a:tc>
-                <a:tc>
-                  <a:txBody>
-                    <a:bodyPr/>
-                    <a:lstStyle/>
-                    <a:p>
-                      <a:pPr algn="ctr"/>
-                      <a:r>
-                        <a:rPr lang="en-US" sz="2400" b="0" dirty="0"/>
-                        <a:t>67.51 </a:t>
-                      </a:r>
-                      <a:r>
-                        <a:rPr lang="hr-HR" sz="2400" b="0" i="0" kern="1200" dirty="0">
-                          <a:solidFill>
-                            <a:schemeClr val="dk1"/>
-                          </a:solidFill>
-                          <a:effectLst/>
-                          <a:latin typeface="+mn-lt"/>
-                          <a:ea typeface="+mn-ea"/>
-                          <a:cs typeface="+mn-cs"/>
-                        </a:rPr>
-                        <a:t>±</a:t>
-                      </a:r>
-                      <a:r>
-                        <a:rPr lang="en-US" sz="2400" b="0" dirty="0"/>
-                        <a:t> 16.37</a:t>
+                        <a:t> 16.4</a:t>
                       </a:r>
                       <a:endParaRPr lang="hr-HR" sz="2400" b="0" dirty="0"/>
                     </a:p>
@@ -6158,11 +6800,11 @@
             <a:pPr lvl="1"/>
             <a:r>
               <a:rPr lang="en-US" sz="2400" dirty="0"/>
-              <a:t>Found 900/946 (</a:t>
+              <a:t>Found 839/946 (</a:t>
             </a:r>
             <a:r>
               <a:rPr lang="en-US" sz="2400" b="1" dirty="0"/>
-              <a:t>95.14%</a:t>
+              <a:t>88.69%</a:t>
             </a:r>
             <a:r>
               <a:rPr lang="en-US" sz="2400" dirty="0"/>
@@ -6189,7 +6831,7 @@
             <a:pPr lvl="1"/>
             <a:r>
               <a:rPr lang="en-US" sz="2400" dirty="0"/>
-              <a:t>Recall: 95.14%</a:t>
+              <a:t>Recall: 88.69%</a:t>
             </a:r>
           </a:p>
           <a:p>
@@ -6200,11 +6842,11 @@
             <a:pPr lvl="1"/>
             <a:r>
               <a:rPr lang="en-US" sz="2400" dirty="0"/>
-              <a:t>46 not detected schools (</a:t>
+              <a:t>107 not detected schools (</a:t>
             </a:r>
             <a:r>
               <a:rPr lang="en-US" sz="2400" b="1" dirty="0"/>
-              <a:t>4.86%</a:t>
+              <a:t>11.31%</a:t>
             </a:r>
             <a:r>
               <a:rPr lang="en-US" sz="2400" dirty="0"/>
@@ -6223,7 +6865,7 @@
             </a:r>
             <a:r>
               <a:rPr lang="en-US" sz="2400" b="1" dirty="0"/>
-              <a:t>9573 images </a:t>
+              <a:t>17 205 images </a:t>
             </a:r>
             <a:endParaRPr lang="hr-HR" sz="2400" b="1" dirty="0"/>
           </a:p>
@@ -6272,6 +6914,577 @@
 </file>
 
 <file path=ppt/slides/slide16.xml><?xml version="1.0" encoding="utf-8"?>
+<p:sld xmlns:a="http://schemas.openxmlformats.org/drawingml/2006/main" xmlns:r="http://schemas.openxmlformats.org/officeDocument/2006/relationships" xmlns:p="http://schemas.openxmlformats.org/presentationml/2006/main">
+  <p:cSld>
+    <p:spTree>
+      <p:nvGrpSpPr>
+        <p:cNvPr id="1" name="">
+          <a:extLst>
+            <a:ext uri="{FF2B5EF4-FFF2-40B4-BE49-F238E27FC236}">
+              <a16:creationId xmlns:a16="http://schemas.microsoft.com/office/drawing/2014/main" id="{178AD634-683B-4126-198F-3D36E74BE1D9}"/>
+            </a:ext>
+          </a:extLst>
+        </p:cNvPr>
+        <p:cNvGrpSpPr/>
+        <p:nvPr/>
+      </p:nvGrpSpPr>
+      <p:grpSpPr>
+        <a:xfrm>
+          <a:off x="0" y="0"/>
+          <a:ext cx="0" cy="0"/>
+          <a:chOff x="0" y="0"/>
+          <a:chExt cx="0" cy="0"/>
+        </a:xfrm>
+      </p:grpSpPr>
+      <p:sp>
+        <p:nvSpPr>
+          <p:cNvPr id="2" name="Title 1">
+            <a:extLst>
+              <a:ext uri="{FF2B5EF4-FFF2-40B4-BE49-F238E27FC236}">
+                <a16:creationId xmlns:a16="http://schemas.microsoft.com/office/drawing/2014/main" id="{CE6D237B-68BE-50F4-B716-62B8F278E32B}"/>
+              </a:ext>
+            </a:extLst>
+          </p:cNvPr>
+          <p:cNvSpPr>
+            <a:spLocks noGrp="1"/>
+          </p:cNvSpPr>
+          <p:nvPr>
+            <p:ph type="title"/>
+          </p:nvPr>
+        </p:nvSpPr>
+        <p:spPr/>
+        <p:txBody>
+          <a:bodyPr/>
+          <a:lstStyle/>
+          <a:p>
+            <a:r>
+              <a:rPr lang="en-US" dirty="0"/>
+              <a:t>Progress comparison</a:t>
+            </a:r>
+            <a:endParaRPr lang="hr-HR" dirty="0"/>
+          </a:p>
+        </p:txBody>
+      </p:sp>
+      <p:sp>
+        <p:nvSpPr>
+          <p:cNvPr id="4" name="Slide Number Placeholder 3">
+            <a:extLst>
+              <a:ext uri="{FF2B5EF4-FFF2-40B4-BE49-F238E27FC236}">
+                <a16:creationId xmlns:a16="http://schemas.microsoft.com/office/drawing/2014/main" id="{4BCBAF89-9139-C8E3-B59E-6CC910A29640}"/>
+              </a:ext>
+            </a:extLst>
+          </p:cNvPr>
+          <p:cNvSpPr>
+            <a:spLocks noGrp="1"/>
+          </p:cNvSpPr>
+          <p:nvPr>
+            <p:ph type="sldNum" sz="quarter" idx="12"/>
+          </p:nvPr>
+        </p:nvSpPr>
+        <p:spPr/>
+        <p:txBody>
+          <a:bodyPr/>
+          <a:lstStyle/>
+          <a:p>
+            <a:fld id="{5434875C-B374-4DCB-B0EF-B862E54336C8}" type="slidenum">
+              <a:rPr lang="hr-HR" smtClean="0"/>
+              <a:t>16</a:t>
+            </a:fld>
+            <a:endParaRPr lang="hr-HR"/>
+          </a:p>
+        </p:txBody>
+      </p:sp>
+      <p:graphicFrame>
+        <p:nvGraphicFramePr>
+          <p:cNvPr id="5" name="Table 4">
+            <a:extLst>
+              <a:ext uri="{FF2B5EF4-FFF2-40B4-BE49-F238E27FC236}">
+                <a16:creationId xmlns:a16="http://schemas.microsoft.com/office/drawing/2014/main" id="{61AF2492-4C7A-650C-864A-6C88C1A515DC}"/>
+              </a:ext>
+            </a:extLst>
+          </p:cNvPr>
+          <p:cNvGraphicFramePr>
+            <a:graphicFrameLocks noGrp="1"/>
+          </p:cNvGraphicFramePr>
+          <p:nvPr>
+            <p:extLst>
+              <p:ext uri="{D42A27DB-BD31-4B8C-83A1-F6EECF244321}">
+                <p14:modId xmlns:p14="http://schemas.microsoft.com/office/powerpoint/2010/main" val="2356229268"/>
+              </p:ext>
+            </p:extLst>
+          </p:nvPr>
+        </p:nvGraphicFramePr>
+        <p:xfrm>
+          <a:off x="1015315" y="1869391"/>
+          <a:ext cx="10161370" cy="3745733"/>
+        </p:xfrm>
+        <a:graphic>
+          <a:graphicData uri="http://schemas.openxmlformats.org/drawingml/2006/table">
+            <a:tbl>
+              <a:tblPr firstRow="1" bandRow="1">
+                <a:tableStyleId>{5C22544A-7EE6-4342-B048-85BDC9FD1C3A}</a:tableStyleId>
+              </a:tblPr>
+              <a:tblGrid>
+                <a:gridCol w="5628791">
+                  <a:extLst>
+                    <a:ext uri="{9D8B030D-6E8A-4147-A177-3AD203B41FA5}">
+                      <a16:colId xmlns:a16="http://schemas.microsoft.com/office/drawing/2014/main" val="1991548073"/>
+                    </a:ext>
+                  </a:extLst>
+                </a:gridCol>
+                <a:gridCol w="1901669">
+                  <a:extLst>
+                    <a:ext uri="{9D8B030D-6E8A-4147-A177-3AD203B41FA5}">
+                      <a16:colId xmlns:a16="http://schemas.microsoft.com/office/drawing/2014/main" val="3366048298"/>
+                    </a:ext>
+                  </a:extLst>
+                </a:gridCol>
+                <a:gridCol w="2630910">
+                  <a:extLst>
+                    <a:ext uri="{9D8B030D-6E8A-4147-A177-3AD203B41FA5}">
+                      <a16:colId xmlns:a16="http://schemas.microsoft.com/office/drawing/2014/main" val="3575401396"/>
+                    </a:ext>
+                  </a:extLst>
+                </a:gridCol>
+              </a:tblGrid>
+              <a:tr h="921950">
+                <a:tc>
+                  <a:txBody>
+                    <a:bodyPr/>
+                    <a:lstStyle/>
+                    <a:p>
+                      <a:pPr algn="ctr"/>
+                      <a:r>
+                        <a:rPr lang="en-US" sz="2400" dirty="0"/>
+                        <a:t>Experiment description</a:t>
+                      </a:r>
+                      <a:endParaRPr lang="hr-HR" sz="2400" dirty="0"/>
+                    </a:p>
+                  </a:txBody>
+                  <a:tcPr anchor="ctr"/>
+                </a:tc>
+                <a:tc>
+                  <a:txBody>
+                    <a:bodyPr/>
+                    <a:lstStyle/>
+                    <a:p>
+                      <a:pPr algn="ctr"/>
+                      <a:r>
+                        <a:rPr lang="en-US" sz="2400" dirty="0"/>
+                        <a:t>Final threshold (%)</a:t>
+                      </a:r>
+                      <a:endParaRPr lang="hr-HR" sz="2400" dirty="0"/>
+                    </a:p>
+                  </a:txBody>
+                  <a:tcPr anchor="ctr"/>
+                </a:tc>
+                <a:tc>
+                  <a:txBody>
+                    <a:bodyPr/>
+                    <a:lstStyle/>
+                    <a:p>
+                      <a:pPr algn="ctr"/>
+                      <a:r>
+                        <a:rPr lang="en-US" sz="2400" dirty="0"/>
+                        <a:t>Test F1 score (%)</a:t>
+                      </a:r>
+                    </a:p>
+                  </a:txBody>
+                  <a:tcPr anchor="ctr"/>
+                </a:tc>
+                <a:extLst>
+                  <a:ext uri="{0D108BD9-81ED-4DB2-BD59-A6C34878D82A}">
+                    <a16:rowId xmlns:a16="http://schemas.microsoft.com/office/drawing/2014/main" val="2654719664"/>
+                  </a:ext>
+                </a:extLst>
+              </a:tr>
+              <a:tr h="666941">
+                <a:tc>
+                  <a:txBody>
+                    <a:bodyPr/>
+                    <a:lstStyle/>
+                    <a:p>
+                      <a:pPr algn="ctr"/>
+                      <a:r>
+                        <a:rPr lang="en-US" sz="2400" dirty="0"/>
+                        <a:t>No fine-tune</a:t>
+                      </a:r>
+                      <a:endParaRPr lang="hr-HR" sz="2400" dirty="0"/>
+                    </a:p>
+                  </a:txBody>
+                  <a:tcPr anchor="ctr"/>
+                </a:tc>
+                <a:tc>
+                  <a:txBody>
+                    <a:bodyPr/>
+                    <a:lstStyle/>
+                    <a:p>
+                      <a:pPr algn="ctr"/>
+                      <a:r>
+                        <a:rPr lang="en-US" sz="2400" dirty="0"/>
+                        <a:t>10.43</a:t>
+                      </a:r>
+                      <a:endParaRPr lang="hr-HR" sz="2400" dirty="0"/>
+                    </a:p>
+                  </a:txBody>
+                  <a:tcPr anchor="ctr"/>
+                </a:tc>
+                <a:tc>
+                  <a:txBody>
+                    <a:bodyPr/>
+                    <a:lstStyle/>
+                    <a:p>
+                      <a:pPr marL="0" marR="0" lvl="0" indent="0" algn="ctr" defTabSz="914400" rtl="0" eaLnBrk="1" fontAlgn="auto" latinLnBrk="0" hangingPunct="1">
+                        <a:lnSpc>
+                          <a:spcPct val="100000"/>
+                        </a:lnSpc>
+                        <a:spcBef>
+                          <a:spcPts val="0"/>
+                        </a:spcBef>
+                        <a:spcAft>
+                          <a:spcPts val="0"/>
+                        </a:spcAft>
+                        <a:buClrTx/>
+                        <a:buSzTx/>
+                        <a:buFontTx/>
+                        <a:buNone/>
+                        <a:tabLst/>
+                        <a:defRPr/>
+                      </a:pPr>
+                      <a:r>
+                        <a:rPr lang="hr-HR" sz="2400" dirty="0"/>
+                        <a:t>62.4</a:t>
+                      </a:r>
+                      <a:r>
+                        <a:rPr lang="en-US" sz="2400" dirty="0"/>
+                        <a:t>0</a:t>
+                      </a:r>
+                      <a:endParaRPr lang="hr-HR" sz="2400" dirty="0"/>
+                    </a:p>
+                  </a:txBody>
+                  <a:tcPr anchor="ctr"/>
+                </a:tc>
+                <a:extLst>
+                  <a:ext uri="{0D108BD9-81ED-4DB2-BD59-A6C34878D82A}">
+                    <a16:rowId xmlns:a16="http://schemas.microsoft.com/office/drawing/2014/main" val="2085629051"/>
+                  </a:ext>
+                </a:extLst>
+              </a:tr>
+              <a:tr h="666941">
+                <a:tc>
+                  <a:txBody>
+                    <a:bodyPr/>
+                    <a:lstStyle/>
+                    <a:p>
+                      <a:pPr algn="ctr"/>
+                      <a:r>
+                        <a:rPr lang="en-US" sz="2400" dirty="0"/>
+                        <a:t>Fine-tune on </a:t>
+                      </a:r>
+                      <a:r>
+                        <a:rPr lang="en-US" sz="2400" dirty="0" err="1"/>
+                        <a:t>Anditi</a:t>
+                      </a:r>
+                      <a:r>
+                        <a:rPr lang="en-US" sz="2400" dirty="0"/>
+                        <a:t>, 1 epoch, 1:1 ratio</a:t>
+                      </a:r>
+                      <a:endParaRPr lang="hr-HR" sz="2400" dirty="0"/>
+                    </a:p>
+                  </a:txBody>
+                  <a:tcPr anchor="ctr"/>
+                </a:tc>
+                <a:tc>
+                  <a:txBody>
+                    <a:bodyPr/>
+                    <a:lstStyle/>
+                    <a:p>
+                      <a:pPr algn="ctr"/>
+                      <a:r>
+                        <a:rPr lang="en-US" sz="2400" dirty="0"/>
+                        <a:t>50</a:t>
+                      </a:r>
+                      <a:endParaRPr lang="hr-HR" sz="2400" dirty="0"/>
+                    </a:p>
+                  </a:txBody>
+                  <a:tcPr anchor="ctr"/>
+                </a:tc>
+                <a:tc>
+                  <a:txBody>
+                    <a:bodyPr/>
+                    <a:lstStyle/>
+                    <a:p>
+                      <a:pPr algn="ctr"/>
+                      <a:r>
+                        <a:rPr lang="en-US" sz="2400" dirty="0"/>
+                        <a:t>60.64</a:t>
+                      </a:r>
+                      <a:endParaRPr lang="hr-HR" sz="2400" dirty="0"/>
+                    </a:p>
+                  </a:txBody>
+                  <a:tcPr anchor="ctr"/>
+                </a:tc>
+                <a:extLst>
+                  <a:ext uri="{0D108BD9-81ED-4DB2-BD59-A6C34878D82A}">
+                    <a16:rowId xmlns:a16="http://schemas.microsoft.com/office/drawing/2014/main" val="724735351"/>
+                  </a:ext>
+                </a:extLst>
+              </a:tr>
+              <a:tr h="666941">
+                <a:tc>
+                  <a:txBody>
+                    <a:bodyPr/>
+                    <a:lstStyle/>
+                    <a:p>
+                      <a:pPr algn="ctr"/>
+                      <a:r>
+                        <a:rPr lang="en-US" sz="2400" dirty="0"/>
+                        <a:t>Fine-tune on </a:t>
+                      </a:r>
+                      <a:r>
+                        <a:rPr lang="en-US" sz="2400" dirty="0" err="1"/>
+                        <a:t>Anditi</a:t>
+                      </a:r>
+                      <a:r>
+                        <a:rPr lang="en-US" sz="2400" dirty="0"/>
+                        <a:t>, 1 epoch, 1:1 ratio</a:t>
+                      </a:r>
+                      <a:endParaRPr lang="hr-HR" sz="2400" dirty="0"/>
+                    </a:p>
+                  </a:txBody>
+                  <a:tcPr anchor="ctr">
+                    <a:lnB w="38100" cap="flat" cmpd="sng" algn="ctr">
+                      <a:solidFill>
+                        <a:schemeClr val="bg1"/>
+                      </a:solidFill>
+                      <a:prstDash val="solid"/>
+                      <a:round/>
+                      <a:headEnd type="none" w="med" len="med"/>
+                      <a:tailEnd type="none" w="med" len="med"/>
+                    </a:lnB>
+                  </a:tcPr>
+                </a:tc>
+                <a:tc>
+                  <a:txBody>
+                    <a:bodyPr/>
+                    <a:lstStyle/>
+                    <a:p>
+                      <a:pPr algn="ctr"/>
+                      <a:r>
+                        <a:rPr lang="en-US" sz="2400" dirty="0"/>
+                        <a:t>8.35</a:t>
+                      </a:r>
+                      <a:endParaRPr lang="hr-HR" sz="2400" dirty="0"/>
+                    </a:p>
+                  </a:txBody>
+                  <a:tcPr anchor="ctr">
+                    <a:lnB w="38100" cap="flat" cmpd="sng" algn="ctr">
+                      <a:solidFill>
+                        <a:schemeClr val="bg1"/>
+                      </a:solidFill>
+                      <a:prstDash val="solid"/>
+                      <a:round/>
+                      <a:headEnd type="none" w="med" len="med"/>
+                      <a:tailEnd type="none" w="med" len="med"/>
+                    </a:lnB>
+                  </a:tcPr>
+                </a:tc>
+                <a:tc>
+                  <a:txBody>
+                    <a:bodyPr/>
+                    <a:lstStyle/>
+                    <a:p>
+                      <a:pPr algn="ctr"/>
+                      <a:r>
+                        <a:rPr lang="en-US" sz="2400" b="1" dirty="0"/>
+                        <a:t>65.64</a:t>
+                      </a:r>
+                      <a:endParaRPr lang="hr-HR" sz="2400" b="1" dirty="0"/>
+                    </a:p>
+                  </a:txBody>
+                  <a:tcPr anchor="ctr">
+                    <a:lnB w="38100" cap="flat" cmpd="sng" algn="ctr">
+                      <a:solidFill>
+                        <a:schemeClr val="bg1"/>
+                      </a:solidFill>
+                      <a:prstDash val="solid"/>
+                      <a:round/>
+                      <a:headEnd type="none" w="med" len="med"/>
+                      <a:tailEnd type="none" w="med" len="med"/>
+                    </a:lnB>
+                  </a:tcPr>
+                </a:tc>
+                <a:extLst>
+                  <a:ext uri="{0D108BD9-81ED-4DB2-BD59-A6C34878D82A}">
+                    <a16:rowId xmlns:a16="http://schemas.microsoft.com/office/drawing/2014/main" val="3904148820"/>
+                  </a:ext>
+                </a:extLst>
+              </a:tr>
+              <a:tr h="666941">
+                <a:tc>
+                  <a:txBody>
+                    <a:bodyPr/>
+                    <a:lstStyle/>
+                    <a:p>
+                      <a:pPr algn="ctr"/>
+                      <a:r>
+                        <a:rPr lang="en-US" sz="2400" dirty="0"/>
+                        <a:t>Fine-tune on </a:t>
+                      </a:r>
+                      <a:r>
+                        <a:rPr lang="en-US" sz="2400" dirty="0" err="1"/>
+                        <a:t>Anditi</a:t>
+                      </a:r>
+                      <a:r>
+                        <a:rPr lang="en-US" sz="2400" dirty="0"/>
+                        <a:t>, 1 epoch, 1:1 ratio, </a:t>
+                      </a:r>
+                      <a:r>
+                        <a:rPr lang="en-US" sz="2400" b="1" dirty="0"/>
+                        <a:t>over-optimistic (oracle)</a:t>
+                      </a:r>
+                      <a:endParaRPr lang="hr-HR" sz="2400" b="1" dirty="0"/>
+                    </a:p>
+                  </a:txBody>
+                  <a:tcPr anchor="ctr">
+                    <a:lnT w="38100" cap="flat" cmpd="sng" algn="ctr">
+                      <a:solidFill>
+                        <a:schemeClr val="bg1"/>
+                      </a:solidFill>
+                      <a:prstDash val="solid"/>
+                      <a:round/>
+                      <a:headEnd type="none" w="med" len="med"/>
+                      <a:tailEnd type="none" w="med" len="med"/>
+                    </a:lnT>
+                  </a:tcPr>
+                </a:tc>
+                <a:tc>
+                  <a:txBody>
+                    <a:bodyPr/>
+                    <a:lstStyle/>
+                    <a:p>
+                      <a:pPr marL="0" marR="0" lvl="0" indent="0" algn="ctr" defTabSz="914400" rtl="0" eaLnBrk="1" fontAlgn="auto" latinLnBrk="0" hangingPunct="1">
+                        <a:lnSpc>
+                          <a:spcPct val="100000"/>
+                        </a:lnSpc>
+                        <a:spcBef>
+                          <a:spcPts val="0"/>
+                        </a:spcBef>
+                        <a:spcAft>
+                          <a:spcPts val="0"/>
+                        </a:spcAft>
+                        <a:buClrTx/>
+                        <a:buSzTx/>
+                        <a:buFontTx/>
+                        <a:buNone/>
+                        <a:tabLst/>
+                        <a:defRPr/>
+                      </a:pPr>
+                      <a:r>
+                        <a:rPr lang="en-US" sz="2400" dirty="0"/>
+                        <a:t>8.35</a:t>
+                      </a:r>
+                      <a:endParaRPr lang="hr-HR" sz="2400" dirty="0"/>
+                    </a:p>
+                  </a:txBody>
+                  <a:tcPr anchor="ctr">
+                    <a:lnT w="38100" cap="flat" cmpd="sng" algn="ctr">
+                      <a:solidFill>
+                        <a:schemeClr val="bg1"/>
+                      </a:solidFill>
+                      <a:prstDash val="solid"/>
+                      <a:round/>
+                      <a:headEnd type="none" w="med" len="med"/>
+                      <a:tailEnd type="none" w="med" len="med"/>
+                    </a:lnT>
+                  </a:tcPr>
+                </a:tc>
+                <a:tc>
+                  <a:txBody>
+                    <a:bodyPr/>
+                    <a:lstStyle/>
+                    <a:p>
+                      <a:pPr algn="ctr"/>
+                      <a:r>
+                        <a:rPr lang="en-US" sz="2400" dirty="0"/>
+                        <a:t>70.90*</a:t>
+                      </a:r>
+                      <a:endParaRPr lang="hr-HR" sz="2400" dirty="0"/>
+                    </a:p>
+                  </a:txBody>
+                  <a:tcPr anchor="ctr">
+                    <a:lnT w="38100" cap="flat" cmpd="sng" algn="ctr">
+                      <a:solidFill>
+                        <a:schemeClr val="bg1"/>
+                      </a:solidFill>
+                      <a:prstDash val="solid"/>
+                      <a:round/>
+                      <a:headEnd type="none" w="med" len="med"/>
+                      <a:tailEnd type="none" w="med" len="med"/>
+                    </a:lnT>
+                  </a:tcPr>
+                </a:tc>
+                <a:extLst>
+                  <a:ext uri="{0D108BD9-81ED-4DB2-BD59-A6C34878D82A}">
+                    <a16:rowId xmlns:a16="http://schemas.microsoft.com/office/drawing/2014/main" val="741738474"/>
+                  </a:ext>
+                </a:extLst>
+              </a:tr>
+            </a:tbl>
+          </a:graphicData>
+        </a:graphic>
+      </p:graphicFrame>
+      <p:sp>
+        <p:nvSpPr>
+          <p:cNvPr id="3" name="TextBox 2">
+            <a:extLst>
+              <a:ext uri="{FF2B5EF4-FFF2-40B4-BE49-F238E27FC236}">
+                <a16:creationId xmlns:a16="http://schemas.microsoft.com/office/drawing/2014/main" id="{CC773CA5-1750-AB53-A727-208917544E8A}"/>
+              </a:ext>
+            </a:extLst>
+          </p:cNvPr>
+          <p:cNvSpPr txBox="1"/>
+          <p:nvPr/>
+        </p:nvSpPr>
+        <p:spPr>
+          <a:xfrm>
+            <a:off x="2535474" y="5747155"/>
+            <a:ext cx="7121051" cy="461665"/>
+          </a:xfrm>
+          <a:prstGeom prst="rect">
+            <a:avLst/>
+          </a:prstGeom>
+          <a:noFill/>
+        </p:spPr>
+        <p:txBody>
+          <a:bodyPr wrap="square" rtlCol="0">
+            <a:spAutoFit/>
+          </a:bodyPr>
+          <a:lstStyle/>
+          <a:p>
+            <a:pPr algn="ctr"/>
+            <a:r>
+              <a:rPr lang="en-US" sz="2400" dirty="0"/>
+              <a:t>* isn’t test F1 score (shows score for the entire dataset)</a:t>
+            </a:r>
+            <a:endParaRPr lang="hr-HR" sz="2400" dirty="0"/>
+          </a:p>
+        </p:txBody>
+      </p:sp>
+    </p:spTree>
+    <p:extLst>
+      <p:ext uri="{BB962C8B-B14F-4D97-AF65-F5344CB8AC3E}">
+        <p14:creationId xmlns:p14="http://schemas.microsoft.com/office/powerpoint/2010/main" val="663330041"/>
+      </p:ext>
+    </p:extLst>
+  </p:cSld>
+  <p:clrMapOvr>
+    <a:masterClrMapping/>
+  </p:clrMapOvr>
+</p:sld>
+</file>
+
+<file path=ppt/slides/slide17.xml><?xml version="1.0" encoding="utf-8"?>
 <p:sld xmlns:a="http://schemas.openxmlformats.org/drawingml/2006/main" xmlns:r="http://schemas.openxmlformats.org/officeDocument/2006/relationships" xmlns:p="http://schemas.openxmlformats.org/presentationml/2006/main">
   <p:cSld>
     <p:spTree>
@@ -6367,39 +7580,33 @@
           <a:p>
             <a:pPr lvl="2"/>
             <a:r>
+              <a:rPr lang="en-US" sz="2400" dirty="0"/>
+              <a:t>Exhaustive, over-optimistic: </a:t>
+            </a:r>
+            <a:r>
+              <a:rPr lang="hr-HR" sz="2400" dirty="0"/>
+              <a:t>70.90</a:t>
+            </a:r>
+            <a:r>
+              <a:rPr lang="en-US" sz="2400" dirty="0"/>
+              <a:t>%</a:t>
+            </a:r>
+          </a:p>
+          <a:p>
+            <a:pPr lvl="2"/>
+            <a:r>
               <a:rPr lang="en-US" sz="2400" b="1" dirty="0"/>
-              <a:t>Exhaustive: </a:t>
-            </a:r>
-            <a:r>
-              <a:rPr lang="hr-HR" sz="2400" b="1" dirty="0"/>
-              <a:t>70.90</a:t>
-            </a:r>
-            <a:r>
+              <a:t>Exhaustive, test (cross-validated): 65.64%</a:t>
+            </a:r>
+            <a:br>
               <a:rPr lang="en-US" sz="2400" b="1" dirty="0"/>
-              <a:t>%</a:t>
-            </a:r>
-          </a:p>
-          <a:p>
-            <a:pPr lvl="1"/>
+            </a:br>
             <a:endParaRPr lang="en-US" sz="2400" dirty="0"/>
           </a:p>
           <a:p>
-            <a:pPr lvl="1"/>
-            <a:r>
-              <a:rPr lang="en-US" sz="2400" dirty="0"/>
-              <a:t>Fine-tuning for 20 epochs may overfit the nation-wide model to </a:t>
-            </a:r>
-            <a:r>
-              <a:rPr lang="en-US" sz="2400" dirty="0" err="1"/>
-              <a:t>Anditi</a:t>
-            </a:r>
-            <a:r>
-              <a:rPr lang="en-US" sz="2400" dirty="0"/>
-              <a:t> dataset</a:t>
-            </a:r>
-          </a:p>
-          <a:p>
-            <a:pPr lvl="1"/>
+            <a:pPr marL="201168" lvl="1" indent="0">
+              <a:buNone/>
+            </a:pPr>
             <a:endParaRPr lang="en-US" sz="2400" dirty="0"/>
           </a:p>
           <a:p>
@@ -6440,7 +7647,7 @@
           <a:p>
             <a:fld id="{5434875C-B374-4DCB-B0EF-B862E54336C8}" type="slidenum">
               <a:rPr lang="hr-HR" smtClean="0"/>
-              <a:t>16</a:t>
+              <a:t>17</a:t>
             </a:fld>
             <a:endParaRPr lang="hr-HR"/>
           </a:p>
@@ -8319,19 +9526,11 @@
             <a:pPr lvl="1"/>
             <a:r>
               <a:rPr lang="en-US" sz="2400" dirty="0"/>
-              <a:t>Potential </a:t>
+              <a:t>Potential</a:t>
             </a:r>
             <a:r>
               <a:rPr lang="en-US" sz="2400" b="1" dirty="0"/>
-              <a:t>data leakage </a:t>
-            </a:r>
-            <a:r>
-              <a:rPr lang="en-US" sz="2400" dirty="0"/>
-              <a:t>and</a:t>
-            </a:r>
-            <a:r>
-              <a:rPr lang="en-US" sz="2400" b="1" dirty="0"/>
-              <a:t> biased results</a:t>
+              <a:t> over-optimistic results</a:t>
             </a:r>
           </a:p>
           <a:p>
@@ -8350,15 +9549,7 @@
             </a:r>
             <a:r>
               <a:rPr lang="en-US" sz="2400" dirty="0"/>
-              <a:t>and then evaluate the model’s performance </a:t>
-            </a:r>
-            <a:r>
-              <a:rPr lang="en-US" sz="2400"/>
-              <a:t>with the chosen </a:t>
-            </a:r>
-            <a:r>
-              <a:rPr lang="en-US" sz="2400" dirty="0"/>
-              <a:t>threshold on a second subset (test set)</a:t>
+              <a:t>and then evaluate the model’s performance with the chosen threshold on a second subset (test set)</a:t>
             </a:r>
           </a:p>
           <a:p>
@@ -8377,7 +9568,7 @@
             </a:r>
             <a:r>
               <a:rPr lang="en-US" sz="2400" dirty="0"/>
-              <a:t> (model with no fine-tuning)</a:t>
+              <a:t> (model without fine-tuning)</a:t>
             </a:r>
             <a:endParaRPr lang="hr-HR" sz="2400" dirty="0"/>
           </a:p>

--- a/presentations/27.2/School mapping in ESRI imagery.pptx
+++ b/presentations/27.2/School mapping in ESRI imagery.pptx
@@ -6800,11 +6800,11 @@
             <a:pPr lvl="1"/>
             <a:r>
               <a:rPr lang="en-US" sz="2400" dirty="0"/>
-              <a:t>Found 839/946 (</a:t>
+              <a:t>Found 936/946 (</a:t>
             </a:r>
             <a:r>
               <a:rPr lang="en-US" sz="2400" b="1" dirty="0"/>
-              <a:t>88.69%</a:t>
+              <a:t>98.94%</a:t>
             </a:r>
             <a:r>
               <a:rPr lang="en-US" sz="2400" dirty="0"/>
@@ -6831,7 +6831,7 @@
             <a:pPr lvl="1"/>
             <a:r>
               <a:rPr lang="en-US" sz="2400" dirty="0"/>
-              <a:t>Recall: 88.69%</a:t>
+              <a:t>Recall: 98.94%</a:t>
             </a:r>
           </a:p>
           <a:p>
@@ -6842,11 +6842,11 @@
             <a:pPr lvl="1"/>
             <a:r>
               <a:rPr lang="en-US" sz="2400" dirty="0"/>
-              <a:t>107 not detected schools (</a:t>
+              <a:t>10 not detected schools (</a:t>
             </a:r>
             <a:r>
               <a:rPr lang="en-US" sz="2400" b="1" dirty="0"/>
-              <a:t>11.31%</a:t>
+              <a:t>1.06%</a:t>
             </a:r>
             <a:r>
               <a:rPr lang="en-US" sz="2400" dirty="0"/>

--- a/presentations/27.2/School mapping in ESRI imagery.pptx
+++ b/presentations/27.2/School mapping in ESRI imagery.pptx
@@ -5,7 +5,7 @@
     <p:sldMasterId id="2147483684" r:id="rId1"/>
   </p:sldMasterIdLst>
   <p:notesMasterIdLst>
-    <p:notesMasterId r:id="rId19"/>
+    <p:notesMasterId r:id="rId20"/>
   </p:notesMasterIdLst>
   <p:sldIdLst>
     <p:sldId id="256" r:id="rId2"/>
@@ -23,8 +23,9 @@
     <p:sldId id="321" r:id="rId14"/>
     <p:sldId id="298" r:id="rId15"/>
     <p:sldId id="302" r:id="rId16"/>
-    <p:sldId id="322" r:id="rId17"/>
-    <p:sldId id="315" r:id="rId18"/>
+    <p:sldId id="323" r:id="rId17"/>
+    <p:sldId id="322" r:id="rId18"/>
+    <p:sldId id="315" r:id="rId19"/>
   </p:sldIdLst>
   <p:sldSz cx="12192000" cy="6858000"/>
   <p:notesSz cx="6858000" cy="9144000"/>
@@ -6603,15 +6604,7 @@
             </a:r>
             <a:r>
               <a:rPr lang="en-US" sz="2400" b="1" dirty="0"/>
-              <a:t>number of detected </a:t>
-            </a:r>
-            <a:r>
-              <a:rPr lang="en-US" sz="2400" b="1" dirty="0" err="1"/>
-              <a:t>Anditi</a:t>
-            </a:r>
-            <a:r>
-              <a:rPr lang="en-US" sz="2400" b="1" dirty="0"/>
-              <a:t> schools (train data)</a:t>
+              <a:t>number of detected schools</a:t>
             </a:r>
           </a:p>
           <a:p>
@@ -6727,7 +6720,12 @@
             <p:ph type="title"/>
           </p:nvPr>
         </p:nvSpPr>
-        <p:spPr/>
+        <p:spPr>
+          <a:xfrm>
+            <a:off x="1097280" y="286603"/>
+            <a:ext cx="10616738" cy="1450757"/>
+          </a:xfrm>
+        </p:spPr>
         <p:txBody>
           <a:bodyPr/>
           <a:lstStyle/>
@@ -6735,6 +6733,14 @@
             <a:r>
               <a:rPr lang="hr-HR" dirty="0"/>
               <a:t>Dense inference</a:t>
+            </a:r>
+            <a:r>
+              <a:rPr lang="en-US" dirty="0"/>
+              <a:t>, </a:t>
+            </a:r>
+            <a:r>
+              <a:rPr lang="en-US" dirty="0" err="1"/>
+              <a:t>Anditi</a:t>
             </a:r>
             <a:r>
               <a:rPr lang="en-US" dirty="0"/>
@@ -6914,6 +6920,222 @@
 </file>
 
 <file path=ppt/slides/slide16.xml><?xml version="1.0" encoding="utf-8"?>
+<p:sld xmlns:a="http://schemas.openxmlformats.org/drawingml/2006/main" xmlns:r="http://schemas.openxmlformats.org/officeDocument/2006/relationships" xmlns:p="http://schemas.openxmlformats.org/presentationml/2006/main">
+  <p:cSld>
+    <p:spTree>
+      <p:nvGrpSpPr>
+        <p:cNvPr id="1" name="">
+          <a:extLst>
+            <a:ext uri="{FF2B5EF4-FFF2-40B4-BE49-F238E27FC236}">
+              <a16:creationId xmlns:a16="http://schemas.microsoft.com/office/drawing/2014/main" id="{6D202C21-7E56-4F69-015C-2327638DFEF4}"/>
+            </a:ext>
+          </a:extLst>
+        </p:cNvPr>
+        <p:cNvGrpSpPr/>
+        <p:nvPr/>
+      </p:nvGrpSpPr>
+      <p:grpSpPr>
+        <a:xfrm>
+          <a:off x="0" y="0"/>
+          <a:ext cx="0" cy="0"/>
+          <a:chOff x="0" y="0"/>
+          <a:chExt cx="0" cy="0"/>
+        </a:xfrm>
+      </p:grpSpPr>
+      <p:sp>
+        <p:nvSpPr>
+          <p:cNvPr id="2" name="Title 1">
+            <a:extLst>
+              <a:ext uri="{FF2B5EF4-FFF2-40B4-BE49-F238E27FC236}">
+                <a16:creationId xmlns:a16="http://schemas.microsoft.com/office/drawing/2014/main" id="{0ECFFA1E-E1B5-EC4E-A83A-2132B53555BD}"/>
+              </a:ext>
+            </a:extLst>
+          </p:cNvPr>
+          <p:cNvSpPr>
+            <a:spLocks noGrp="1"/>
+          </p:cNvSpPr>
+          <p:nvPr>
+            <p:ph type="title"/>
+          </p:nvPr>
+        </p:nvSpPr>
+        <p:spPr>
+          <a:xfrm>
+            <a:off x="1097279" y="286603"/>
+            <a:ext cx="10457411" cy="1450757"/>
+          </a:xfrm>
+        </p:spPr>
+        <p:txBody>
+          <a:bodyPr/>
+          <a:lstStyle/>
+          <a:p>
+            <a:r>
+              <a:rPr lang="hr-HR" dirty="0"/>
+              <a:t>Dense inference</a:t>
+            </a:r>
+            <a:r>
+              <a:rPr lang="en-US" dirty="0"/>
+              <a:t>, wide results (after NMS)</a:t>
+            </a:r>
+            <a:endParaRPr lang="hr-HR" dirty="0"/>
+          </a:p>
+        </p:txBody>
+      </p:sp>
+      <p:sp>
+        <p:nvSpPr>
+          <p:cNvPr id="3" name="Content Placeholder 2">
+            <a:extLst>
+              <a:ext uri="{FF2B5EF4-FFF2-40B4-BE49-F238E27FC236}">
+                <a16:creationId xmlns:a16="http://schemas.microsoft.com/office/drawing/2014/main" id="{48E00BB3-59DC-26AE-DF5A-EC1A2B056648}"/>
+              </a:ext>
+            </a:extLst>
+          </p:cNvPr>
+          <p:cNvSpPr>
+            <a:spLocks noGrp="1"/>
+          </p:cNvSpPr>
+          <p:nvPr>
+            <p:ph idx="1"/>
+          </p:nvPr>
+        </p:nvSpPr>
+        <p:spPr>
+          <a:xfrm>
+            <a:off x="1097279" y="1845733"/>
+            <a:ext cx="10772503" cy="4441855"/>
+          </a:xfrm>
+        </p:spPr>
+        <p:txBody>
+          <a:bodyPr>
+            <a:normAutofit/>
+          </a:bodyPr>
+          <a:lstStyle/>
+          <a:p>
+            <a:pPr lvl="1"/>
+            <a:r>
+              <a:rPr lang="hr-HR" sz="2400" dirty="0"/>
+              <a:t>Check performance on </a:t>
+            </a:r>
+            <a:r>
+              <a:rPr lang="en-US" sz="2400" b="1" dirty="0"/>
+              <a:t>wide</a:t>
+            </a:r>
+            <a:r>
+              <a:rPr lang="hr-HR" sz="2400" b="1" dirty="0"/>
+              <a:t> data</a:t>
+            </a:r>
+            <a:r>
+              <a:rPr lang="en-US" sz="2400" b="1" dirty="0"/>
+              <a:t>set</a:t>
+            </a:r>
+          </a:p>
+          <a:p>
+            <a:pPr marL="201168" lvl="1" indent="0">
+              <a:buNone/>
+            </a:pPr>
+            <a:endParaRPr lang="hr-HR" sz="2400" dirty="0"/>
+          </a:p>
+          <a:p>
+            <a:pPr lvl="1"/>
+            <a:r>
+              <a:rPr lang="en-US" sz="2400" dirty="0"/>
+              <a:t>Found 88/93 (</a:t>
+            </a:r>
+            <a:r>
+              <a:rPr lang="en-US" sz="2400" b="1" dirty="0"/>
+              <a:t>94.62%</a:t>
+            </a:r>
+            <a:r>
+              <a:rPr lang="en-US" sz="2400" dirty="0"/>
+              <a:t>)</a:t>
+            </a:r>
+            <a:r>
+              <a:rPr lang="en-US" sz="2400" b="1" dirty="0"/>
+              <a:t> </a:t>
+            </a:r>
+            <a:r>
+              <a:rPr lang="en-US" sz="2400" dirty="0"/>
+              <a:t>schools</a:t>
+            </a:r>
+          </a:p>
+          <a:p>
+            <a:pPr lvl="1"/>
+            <a:endParaRPr lang="en-US" sz="2400" dirty="0"/>
+          </a:p>
+          <a:p>
+            <a:pPr lvl="1"/>
+            <a:r>
+              <a:rPr lang="en-US" sz="2400" dirty="0"/>
+              <a:t>Recall: 94.62%</a:t>
+            </a:r>
+          </a:p>
+          <a:p>
+            <a:pPr lvl="1"/>
+            <a:endParaRPr lang="en-US" sz="2400" dirty="0"/>
+          </a:p>
+          <a:p>
+            <a:pPr lvl="1"/>
+            <a:r>
+              <a:rPr lang="en-US" sz="2400" dirty="0"/>
+              <a:t>5 not detected schools (</a:t>
+            </a:r>
+            <a:r>
+              <a:rPr lang="en-US" sz="2400" b="1" dirty="0"/>
+              <a:t>5.38%</a:t>
+            </a:r>
+            <a:r>
+              <a:rPr lang="en-US" sz="2400" dirty="0"/>
+              <a:t>)</a:t>
+            </a:r>
+          </a:p>
+          <a:p>
+            <a:pPr marL="201168" lvl="1" indent="0">
+              <a:buNone/>
+            </a:pPr>
+            <a:endParaRPr lang="en-US" sz="2400" dirty="0"/>
+          </a:p>
+        </p:txBody>
+      </p:sp>
+      <p:sp>
+        <p:nvSpPr>
+          <p:cNvPr id="4" name="Slide Number Placeholder 3">
+            <a:extLst>
+              <a:ext uri="{FF2B5EF4-FFF2-40B4-BE49-F238E27FC236}">
+                <a16:creationId xmlns:a16="http://schemas.microsoft.com/office/drawing/2014/main" id="{1A201542-DA6E-1C0A-4513-CDA6DC54E09F}"/>
+              </a:ext>
+            </a:extLst>
+          </p:cNvPr>
+          <p:cNvSpPr>
+            <a:spLocks noGrp="1"/>
+          </p:cNvSpPr>
+          <p:nvPr>
+            <p:ph type="sldNum" sz="quarter" idx="12"/>
+          </p:nvPr>
+        </p:nvSpPr>
+        <p:spPr/>
+        <p:txBody>
+          <a:bodyPr/>
+          <a:lstStyle/>
+          <a:p>
+            <a:fld id="{5434875C-B374-4DCB-B0EF-B862E54336C8}" type="slidenum">
+              <a:rPr lang="hr-HR" smtClean="0"/>
+              <a:t>16</a:t>
+            </a:fld>
+            <a:endParaRPr lang="hr-HR"/>
+          </a:p>
+        </p:txBody>
+      </p:sp>
+    </p:spTree>
+    <p:extLst>
+      <p:ext uri="{BB962C8B-B14F-4D97-AF65-F5344CB8AC3E}">
+        <p14:creationId xmlns:p14="http://schemas.microsoft.com/office/powerpoint/2010/main" val="719781610"/>
+      </p:ext>
+    </p:extLst>
+  </p:cSld>
+  <p:clrMapOvr>
+    <a:masterClrMapping/>
+  </p:clrMapOvr>
+</p:sld>
+</file>
+
+<file path=ppt/slides/slide17.xml><?xml version="1.0" encoding="utf-8"?>
 <p:sld xmlns:a="http://schemas.openxmlformats.org/drawingml/2006/main" xmlns:r="http://schemas.openxmlformats.org/officeDocument/2006/relationships" xmlns:p="http://schemas.openxmlformats.org/presentationml/2006/main">
   <p:cSld>
     <p:spTree>
@@ -6988,7 +7210,7 @@
           <a:p>
             <a:fld id="{5434875C-B374-4DCB-B0EF-B862E54336C8}" type="slidenum">
               <a:rPr lang="hr-HR" smtClean="0"/>
-              <a:t>16</a:t>
+              <a:t>17</a:t>
             </a:fld>
             <a:endParaRPr lang="hr-HR"/>
           </a:p>
@@ -7484,7 +7706,7 @@
 </p:sld>
 </file>
 
-<file path=ppt/slides/slide17.xml><?xml version="1.0" encoding="utf-8"?>
+<file path=ppt/slides/slide18.xml><?xml version="1.0" encoding="utf-8"?>
 <p:sld xmlns:a="http://schemas.openxmlformats.org/drawingml/2006/main" xmlns:r="http://schemas.openxmlformats.org/officeDocument/2006/relationships" xmlns:p="http://schemas.openxmlformats.org/presentationml/2006/main">
   <p:cSld>
     <p:spTree>
@@ -7647,7 +7869,7 @@
           <a:p>
             <a:fld id="{5434875C-B374-4DCB-B0EF-B862E54336C8}" type="slidenum">
               <a:rPr lang="hr-HR" smtClean="0"/>
-              <a:t>17</a:t>
+              <a:t>18</a:t>
             </a:fld>
             <a:endParaRPr lang="hr-HR"/>
           </a:p>

--- a/presentations/27.2/School mapping in ESRI imagery.pptx
+++ b/presentations/27.2/School mapping in ESRI imagery.pptx
@@ -480,6 +480,90 @@
     </a:lvl9pPr>
   </p:notesStyle>
 </p:notesMaster>
+</file>
+
+<file path=ppt/notesSlides/notesSlide1.xml><?xml version="1.0" encoding="utf-8"?>
+<p:notes xmlns:a="http://schemas.openxmlformats.org/drawingml/2006/main" xmlns:r="http://schemas.openxmlformats.org/officeDocument/2006/relationships" xmlns:p="http://schemas.openxmlformats.org/presentationml/2006/main">
+  <p:cSld>
+    <p:spTree>
+      <p:nvGrpSpPr>
+        <p:cNvPr id="1" name=""/>
+        <p:cNvGrpSpPr/>
+        <p:nvPr/>
+      </p:nvGrpSpPr>
+      <p:grpSpPr>
+        <a:xfrm>
+          <a:off x="0" y="0"/>
+          <a:ext cx="0" cy="0"/>
+          <a:chOff x="0" y="0"/>
+          <a:chExt cx="0" cy="0"/>
+        </a:xfrm>
+      </p:grpSpPr>
+      <p:sp>
+        <p:nvSpPr>
+          <p:cNvPr id="2" name="Slide Image Placeholder 1"/>
+          <p:cNvSpPr>
+            <a:spLocks noGrp="1" noRot="1" noChangeAspect="1"/>
+          </p:cNvSpPr>
+          <p:nvPr>
+            <p:ph type="sldImg"/>
+          </p:nvPr>
+        </p:nvSpPr>
+        <p:spPr/>
+      </p:sp>
+      <p:sp>
+        <p:nvSpPr>
+          <p:cNvPr id="3" name="Notes Placeholder 2"/>
+          <p:cNvSpPr>
+            <a:spLocks noGrp="1"/>
+          </p:cNvSpPr>
+          <p:nvPr>
+            <p:ph type="body" idx="1"/>
+          </p:nvPr>
+        </p:nvSpPr>
+        <p:spPr/>
+        <p:txBody>
+          <a:bodyPr/>
+          <a:lstStyle/>
+          <a:p>
+            <a:endParaRPr lang="hr-HR" dirty="0"/>
+          </a:p>
+        </p:txBody>
+      </p:sp>
+      <p:sp>
+        <p:nvSpPr>
+          <p:cNvPr id="4" name="Slide Number Placeholder 3"/>
+          <p:cNvSpPr>
+            <a:spLocks noGrp="1"/>
+          </p:cNvSpPr>
+          <p:nvPr>
+            <p:ph type="sldNum" sz="quarter" idx="5"/>
+          </p:nvPr>
+        </p:nvSpPr>
+        <p:spPr/>
+        <p:txBody>
+          <a:bodyPr/>
+          <a:lstStyle/>
+          <a:p>
+            <a:fld id="{153AADC4-D7B5-450A-9EF8-CC02CD338196}" type="slidenum">
+              <a:rPr lang="hr-HR" smtClean="0"/>
+              <a:t>11</a:t>
+            </a:fld>
+            <a:endParaRPr lang="hr-HR"/>
+          </a:p>
+        </p:txBody>
+      </p:sp>
+    </p:spTree>
+    <p:extLst>
+      <p:ext uri="{BB962C8B-B14F-4D97-AF65-F5344CB8AC3E}">
+        <p14:creationId xmlns:p14="http://schemas.microsoft.com/office/powerpoint/2010/main" val="3620778695"/>
+      </p:ext>
+    </p:extLst>
+  </p:cSld>
+  <p:clrMapOvr>
+    <a:masterClrMapping/>
+  </p:clrMapOvr>
+</p:notes>
 </file>
 
 <file path=ppt/slideLayouts/slideLayout1.xml><?xml version="1.0" encoding="utf-8"?>
@@ -4526,7 +4610,7 @@
             <a:pPr lvl="1"/>
             <a:r>
               <a:rPr lang="en-US" sz="2400" dirty="0"/>
-              <a:t>Split </a:t>
+              <a:t>Split the </a:t>
             </a:r>
             <a:r>
               <a:rPr lang="en-US" sz="2400" b="1" dirty="0"/>
@@ -4578,7 +4662,7 @@
             <a:pPr lvl="1"/>
             <a:r>
               <a:rPr lang="en-US" sz="2400" dirty="0"/>
-              <a:t>Best threshold decision and metrics calculation are </a:t>
+              <a:t>Now the threshold decision and metrics calculation are </a:t>
             </a:r>
             <a:r>
               <a:rPr lang="en-US" sz="2400" b="1" dirty="0"/>
@@ -6785,7 +6869,15 @@
             </a:r>
             <a:r>
               <a:rPr lang="hr-HR" sz="2400" b="1" dirty="0"/>
-              <a:t>train data (Anditi schools) </a:t>
+              <a:t>train data (</a:t>
+            </a:r>
+            <a:r>
+              <a:rPr lang="en-US" sz="2400" b="1" dirty="0"/>
+              <a:t>1 epoch fine-tuning, </a:t>
+            </a:r>
+            <a:r>
+              <a:rPr lang="hr-HR" sz="2400" b="1" dirty="0"/>
+              <a:t>Anditi schools) </a:t>
             </a:r>
             <a:r>
               <a:rPr lang="hr-HR" sz="2400" dirty="0"/>
@@ -6903,6 +6995,113 @@
               <a:t>15</a:t>
             </a:fld>
             <a:endParaRPr lang="hr-HR"/>
+          </a:p>
+        </p:txBody>
+      </p:sp>
+      <p:sp>
+        <p:nvSpPr>
+          <p:cNvPr id="5" name="Rectangle 1">
+            <a:extLst>
+              <a:ext uri="{FF2B5EF4-FFF2-40B4-BE49-F238E27FC236}">
+                <a16:creationId xmlns:a16="http://schemas.microsoft.com/office/drawing/2014/main" id="{87CFE8CA-F3D9-F020-DD4A-B81D2066B08E}"/>
+              </a:ext>
+            </a:extLst>
+          </p:cNvPr>
+          <p:cNvSpPr>
+            <a:spLocks noChangeArrowheads="1"/>
+          </p:cNvSpPr>
+          <p:nvPr/>
+        </p:nvSpPr>
+        <p:spPr bwMode="auto">
+          <a:xfrm>
+            <a:off x="0" y="0"/>
+            <a:ext cx="12192000" cy="0"/>
+          </a:xfrm>
+          <a:prstGeom prst="rect">
+            <a:avLst/>
+          </a:prstGeom>
+          <a:noFill/>
+          <a:ln>
+            <a:noFill/>
+          </a:ln>
+          <a:effectLst/>
+          <a:extLst>
+            <a:ext uri="{909E8E84-426E-40DD-AFC4-6F175D3DCCD1}">
+              <a14:hiddenFill xmlns:a14="http://schemas.microsoft.com/office/drawing/2010/main">
+                <a:solidFill>
+                  <a:schemeClr val="accent1"/>
+                </a:solidFill>
+              </a14:hiddenFill>
+            </a:ext>
+            <a:ext uri="{91240B29-F687-4F45-9708-019B960494DF}">
+              <a14:hiddenLine xmlns:a14="http://schemas.microsoft.com/office/drawing/2010/main" w="9525">
+                <a:solidFill>
+                  <a:schemeClr val="tx1"/>
+                </a:solidFill>
+                <a:miter lim="800000"/>
+                <a:headEnd/>
+                <a:tailEnd/>
+              </a14:hiddenLine>
+            </a:ext>
+            <a:ext uri="{AF507438-7753-43E0-B8FC-AC1667EBCBE1}">
+              <a14:hiddenEffects xmlns:a14="http://schemas.microsoft.com/office/drawing/2010/main">
+                <a:effectLst>
+                  <a:outerShdw dist="35921" dir="2700000" algn="ctr" rotWithShape="0">
+                    <a:schemeClr val="bg2"/>
+                  </a:outerShdw>
+                </a:effectLst>
+              </a14:hiddenEffects>
+            </a:ext>
+          </a:extLst>
+        </p:spPr>
+        <p:txBody>
+          <a:bodyPr vert="horz" wrap="none" lIns="91440" tIns="45720" rIns="91440" bIns="45720" numCol="1" anchor="ctr" anchorCtr="0" compatLnSpc="1">
+            <a:prstTxWarp prst="textNoShape">
+              <a:avLst/>
+            </a:prstTxWarp>
+            <a:spAutoFit/>
+          </a:bodyPr>
+          <a:lstStyle/>
+          <a:p>
+            <a:pPr marL="0" marR="0" lvl="0" indent="0" algn="l" defTabSz="914400" rtl="0" eaLnBrk="0" fontAlgn="base" latinLnBrk="0" hangingPunct="0">
+              <a:lnSpc>
+                <a:spcPct val="100000"/>
+              </a:lnSpc>
+              <a:spcBef>
+                <a:spcPct val="0"/>
+              </a:spcBef>
+              <a:spcAft>
+                <a:spcPct val="0"/>
+              </a:spcAft>
+              <a:buClrTx/>
+              <a:buSzTx/>
+              <a:buFontTx/>
+              <a:buNone/>
+              <a:tabLst/>
+            </a:pPr>
+            <a:r>
+              <a:rPr kumimoji="0" lang="sr-Latn-RS" altLang="sr-Latn-RS" sz="1100" b="0" i="0" u="none" strike="noStrike" cap="none" normalizeH="0" baseline="0">
+                <a:ln>
+                  <a:noFill/>
+                </a:ln>
+                <a:solidFill>
+                  <a:schemeClr val="tx1"/>
+                </a:solidFill>
+                <a:effectLst/>
+                <a:latin typeface="Arial" panose="020B0604020202020204" pitchFamily="34" charset="0"/>
+              </a:rPr>
+              <a:t>1 epoch fine-tuning</a:t>
+            </a:r>
+            <a:endParaRPr kumimoji="0" lang="sr-Latn-RS" altLang="sr-Latn-RS" sz="1800" b="0" i="0" u="none" strike="noStrike" cap="none" normalizeH="0" baseline="0">
+              <a:ln>
+                <a:noFill/>
+              </a:ln>
+              <a:solidFill>
+                <a:schemeClr val="tx1"/>
+              </a:solidFill>
+              <a:effectLst/>
+              <a:latin typeface="Arial" panose="020B0604020202020204" pitchFamily="34" charset="0"/>
+            </a:endParaRPr>
           </a:p>
         </p:txBody>
       </p:sp>
@@ -9730,7 +9929,7 @@
         <p:spPr/>
         <p:txBody>
           <a:bodyPr>
-            <a:normAutofit/>
+            <a:normAutofit lnSpcReduction="10000"/>
           </a:bodyPr>
           <a:lstStyle/>
           <a:p>
@@ -9748,7 +9947,7 @@
             <a:pPr lvl="1"/>
             <a:r>
               <a:rPr lang="en-US" sz="2400" dirty="0"/>
-              <a:t>Potential</a:t>
+              <a:t>Potentially</a:t>
             </a:r>
             <a:r>
               <a:rPr lang="en-US" sz="2400" b="1" dirty="0"/>
@@ -9790,7 +9989,7 @@
             </a:r>
             <a:r>
               <a:rPr lang="en-US" sz="2400" dirty="0"/>
-              <a:t> (model without fine-tuning)</a:t>
+              <a:t> (model without fine-tuning) to see if (and how much) fine-tuning increases our performance</a:t>
             </a:r>
             <a:endParaRPr lang="hr-HR" sz="2400" dirty="0"/>
           </a:p>
